--- a/ПРЕЗЕНТАЦИЯ.pptx
+++ b/ПРЕЗЕНТАЦИЯ.pptx
@@ -4,6 +4,9 @@
   <p:sldMasterIdLst>
     <p:sldMasterId id="2147483648" r:id="rId1"/>
   </p:sldMasterIdLst>
+  <p:notesMasterIdLst>
+    <p:notesMasterId r:id="rId13"/>
+  </p:notesMasterIdLst>
   <p:sldIdLst>
     <p:sldId id="263" r:id="rId2"/>
     <p:sldId id="264" r:id="rId3"/>
@@ -122,6 +125,530 @@
 </p:presentation>
 </file>
 
+<file path=ppt/notesMasters/notesMaster1.xml><?xml version="1.0" encoding="utf-8"?>
+<p:notesMaster xmlns:a="http://schemas.openxmlformats.org/drawingml/2006/main" xmlns:r="http://schemas.openxmlformats.org/officeDocument/2006/relationships" xmlns:p="http://schemas.openxmlformats.org/presentationml/2006/main">
+  <p:cSld>
+    <p:bg>
+      <p:bgRef idx="1001">
+        <a:schemeClr val="bg1"/>
+      </p:bgRef>
+    </p:bg>
+    <p:spTree>
+      <p:nvGrpSpPr>
+        <p:cNvPr id="1" name=""/>
+        <p:cNvGrpSpPr/>
+        <p:nvPr/>
+      </p:nvGrpSpPr>
+      <p:grpSpPr>
+        <a:xfrm>
+          <a:off x="0" y="0"/>
+          <a:ext cx="0" cy="0"/>
+          <a:chOff x="0" y="0"/>
+          <a:chExt cx="0" cy="0"/>
+        </a:xfrm>
+      </p:grpSpPr>
+      <p:sp>
+        <p:nvSpPr>
+          <p:cNvPr id="2" name="Верхний колонтитул 1"/>
+          <p:cNvSpPr>
+            <a:spLocks noGrp="1"/>
+          </p:cNvSpPr>
+          <p:nvPr>
+            <p:ph type="hdr" sz="quarter"/>
+          </p:nvPr>
+        </p:nvSpPr>
+        <p:spPr>
+          <a:xfrm>
+            <a:off x="0" y="0"/>
+            <a:ext cx="2971800" cy="458788"/>
+          </a:xfrm>
+          <a:prstGeom prst="rect">
+            <a:avLst/>
+          </a:prstGeom>
+        </p:spPr>
+        <p:txBody>
+          <a:bodyPr vert="horz" lIns="91440" tIns="45720" rIns="91440" bIns="45720" rtlCol="0"/>
+          <a:lstStyle>
+            <a:lvl1pPr algn="l">
+              <a:defRPr sz="1200"/>
+            </a:lvl1pPr>
+          </a:lstStyle>
+          <a:p>
+            <a:endParaRPr lang="ru-RU"/>
+          </a:p>
+        </p:txBody>
+      </p:sp>
+      <p:sp>
+        <p:nvSpPr>
+          <p:cNvPr id="3" name="Дата 2"/>
+          <p:cNvSpPr>
+            <a:spLocks noGrp="1"/>
+          </p:cNvSpPr>
+          <p:nvPr>
+            <p:ph type="dt" idx="1"/>
+          </p:nvPr>
+        </p:nvSpPr>
+        <p:spPr>
+          <a:xfrm>
+            <a:off x="3884613" y="0"/>
+            <a:ext cx="2971800" cy="458788"/>
+          </a:xfrm>
+          <a:prstGeom prst="rect">
+            <a:avLst/>
+          </a:prstGeom>
+        </p:spPr>
+        <p:txBody>
+          <a:bodyPr vert="horz" lIns="91440" tIns="45720" rIns="91440" bIns="45720" rtlCol="0"/>
+          <a:lstStyle>
+            <a:lvl1pPr algn="r">
+              <a:defRPr sz="1200"/>
+            </a:lvl1pPr>
+          </a:lstStyle>
+          <a:p>
+            <a:fld id="{5008D7D2-63D2-428F-9B17-AC84042A5E40}" type="datetimeFigureOut">
+              <a:rPr lang="ru-RU" smtClean="0"/>
+              <a:t>11.06.2026</a:t>
+            </a:fld>
+            <a:endParaRPr lang="ru-RU"/>
+          </a:p>
+        </p:txBody>
+      </p:sp>
+      <p:sp>
+        <p:nvSpPr>
+          <p:cNvPr id="4" name="Образ слайда 3"/>
+          <p:cNvSpPr>
+            <a:spLocks noGrp="1" noRot="1" noChangeAspect="1"/>
+          </p:cNvSpPr>
+          <p:nvPr>
+            <p:ph type="sldImg" idx="2"/>
+          </p:nvPr>
+        </p:nvSpPr>
+        <p:spPr>
+          <a:xfrm>
+            <a:off x="685800" y="1143000"/>
+            <a:ext cx="5486400" cy="3086100"/>
+          </a:xfrm>
+          <a:prstGeom prst="rect">
+            <a:avLst/>
+          </a:prstGeom>
+          <a:noFill/>
+          <a:ln w="12700">
+            <a:solidFill>
+              <a:prstClr val="black"/>
+            </a:solidFill>
+          </a:ln>
+        </p:spPr>
+        <p:txBody>
+          <a:bodyPr vert="horz" lIns="91440" tIns="45720" rIns="91440" bIns="45720" rtlCol="0" anchor="ctr"/>
+          <a:lstStyle/>
+          <a:p>
+            <a:endParaRPr lang="ru-RU"/>
+          </a:p>
+        </p:txBody>
+      </p:sp>
+      <p:sp>
+        <p:nvSpPr>
+          <p:cNvPr id="5" name="Заметки 4"/>
+          <p:cNvSpPr>
+            <a:spLocks noGrp="1"/>
+          </p:cNvSpPr>
+          <p:nvPr>
+            <p:ph type="body" sz="quarter" idx="3"/>
+          </p:nvPr>
+        </p:nvSpPr>
+        <p:spPr>
+          <a:xfrm>
+            <a:off x="685800" y="4400550"/>
+            <a:ext cx="5486400" cy="3600450"/>
+          </a:xfrm>
+          <a:prstGeom prst="rect">
+            <a:avLst/>
+          </a:prstGeom>
+        </p:spPr>
+        <p:txBody>
+          <a:bodyPr vert="horz" lIns="91440" tIns="45720" rIns="91440" bIns="45720" rtlCol="0"/>
+          <a:lstStyle/>
+          <a:p>
+            <a:pPr lvl="0"/>
+            <a:r>
+              <a:rPr lang="ru-RU"/>
+              <a:t>Образец текста</a:t>
+            </a:r>
+          </a:p>
+          <a:p>
+            <a:pPr lvl="1"/>
+            <a:r>
+              <a:rPr lang="ru-RU"/>
+              <a:t>Второй уровень</a:t>
+            </a:r>
+          </a:p>
+          <a:p>
+            <a:pPr lvl="2"/>
+            <a:r>
+              <a:rPr lang="ru-RU"/>
+              <a:t>Третий уровень</a:t>
+            </a:r>
+          </a:p>
+          <a:p>
+            <a:pPr lvl="3"/>
+            <a:r>
+              <a:rPr lang="ru-RU"/>
+              <a:t>Четвертый уровень</a:t>
+            </a:r>
+          </a:p>
+          <a:p>
+            <a:pPr lvl="4"/>
+            <a:r>
+              <a:rPr lang="ru-RU"/>
+              <a:t>Пятый уровень</a:t>
+            </a:r>
+          </a:p>
+        </p:txBody>
+      </p:sp>
+      <p:sp>
+        <p:nvSpPr>
+          <p:cNvPr id="6" name="Нижний колонтитул 5"/>
+          <p:cNvSpPr>
+            <a:spLocks noGrp="1"/>
+          </p:cNvSpPr>
+          <p:nvPr>
+            <p:ph type="ftr" sz="quarter" idx="4"/>
+          </p:nvPr>
+        </p:nvSpPr>
+        <p:spPr>
+          <a:xfrm>
+            <a:off x="0" y="8685213"/>
+            <a:ext cx="2971800" cy="458787"/>
+          </a:xfrm>
+          <a:prstGeom prst="rect">
+            <a:avLst/>
+          </a:prstGeom>
+        </p:spPr>
+        <p:txBody>
+          <a:bodyPr vert="horz" lIns="91440" tIns="45720" rIns="91440" bIns="45720" rtlCol="0" anchor="b"/>
+          <a:lstStyle>
+            <a:lvl1pPr algn="l">
+              <a:defRPr sz="1200"/>
+            </a:lvl1pPr>
+          </a:lstStyle>
+          <a:p>
+            <a:endParaRPr lang="ru-RU"/>
+          </a:p>
+        </p:txBody>
+      </p:sp>
+      <p:sp>
+        <p:nvSpPr>
+          <p:cNvPr id="7" name="Номер слайда 6"/>
+          <p:cNvSpPr>
+            <a:spLocks noGrp="1"/>
+          </p:cNvSpPr>
+          <p:nvPr>
+            <p:ph type="sldNum" sz="quarter" idx="5"/>
+          </p:nvPr>
+        </p:nvSpPr>
+        <p:spPr>
+          <a:xfrm>
+            <a:off x="3884613" y="8685213"/>
+            <a:ext cx="2971800" cy="458787"/>
+          </a:xfrm>
+          <a:prstGeom prst="rect">
+            <a:avLst/>
+          </a:prstGeom>
+        </p:spPr>
+        <p:txBody>
+          <a:bodyPr vert="horz" lIns="91440" tIns="45720" rIns="91440" bIns="45720" rtlCol="0" anchor="b"/>
+          <a:lstStyle>
+            <a:lvl1pPr algn="r">
+              <a:defRPr sz="1200"/>
+            </a:lvl1pPr>
+          </a:lstStyle>
+          <a:p>
+            <a:fld id="{83F01674-9CE6-48EA-994F-300955615A5B}" type="slidenum">
+              <a:rPr lang="ru-RU" smtClean="0"/>
+              <a:t>‹#›</a:t>
+            </a:fld>
+            <a:endParaRPr lang="ru-RU"/>
+          </a:p>
+        </p:txBody>
+      </p:sp>
+    </p:spTree>
+    <p:extLst>
+      <p:ext uri="{BB962C8B-B14F-4D97-AF65-F5344CB8AC3E}">
+        <p14:creationId xmlns:p14="http://schemas.microsoft.com/office/powerpoint/2010/main" val="140715786"/>
+      </p:ext>
+    </p:extLst>
+  </p:cSld>
+  <p:clrMap bg1="lt1" tx1="dk1" bg2="lt2" tx2="dk2" accent1="accent1" accent2="accent2" accent3="accent3" accent4="accent4" accent5="accent5" accent6="accent6" hlink="hlink" folHlink="folHlink"/>
+  <p:notesStyle>
+    <a:lvl1pPr marL="0" algn="l" defTabSz="914400" rtl="0" eaLnBrk="1" latinLnBrk="0" hangingPunct="1">
+      <a:defRPr sz="1200" kern="1200">
+        <a:solidFill>
+          <a:schemeClr val="tx1"/>
+        </a:solidFill>
+        <a:latin typeface="+mn-lt"/>
+        <a:ea typeface="+mn-ea"/>
+        <a:cs typeface="+mn-cs"/>
+      </a:defRPr>
+    </a:lvl1pPr>
+    <a:lvl2pPr marL="457200" algn="l" defTabSz="914400" rtl="0" eaLnBrk="1" latinLnBrk="0" hangingPunct="1">
+      <a:defRPr sz="1200" kern="1200">
+        <a:solidFill>
+          <a:schemeClr val="tx1"/>
+        </a:solidFill>
+        <a:latin typeface="+mn-lt"/>
+        <a:ea typeface="+mn-ea"/>
+        <a:cs typeface="+mn-cs"/>
+      </a:defRPr>
+    </a:lvl2pPr>
+    <a:lvl3pPr marL="914400" algn="l" defTabSz="914400" rtl="0" eaLnBrk="1" latinLnBrk="0" hangingPunct="1">
+      <a:defRPr sz="1200" kern="1200">
+        <a:solidFill>
+          <a:schemeClr val="tx1"/>
+        </a:solidFill>
+        <a:latin typeface="+mn-lt"/>
+        <a:ea typeface="+mn-ea"/>
+        <a:cs typeface="+mn-cs"/>
+      </a:defRPr>
+    </a:lvl3pPr>
+    <a:lvl4pPr marL="1371600" algn="l" defTabSz="914400" rtl="0" eaLnBrk="1" latinLnBrk="0" hangingPunct="1">
+      <a:defRPr sz="1200" kern="1200">
+        <a:solidFill>
+          <a:schemeClr val="tx1"/>
+        </a:solidFill>
+        <a:latin typeface="+mn-lt"/>
+        <a:ea typeface="+mn-ea"/>
+        <a:cs typeface="+mn-cs"/>
+      </a:defRPr>
+    </a:lvl4pPr>
+    <a:lvl5pPr marL="1828800" algn="l" defTabSz="914400" rtl="0" eaLnBrk="1" latinLnBrk="0" hangingPunct="1">
+      <a:defRPr sz="1200" kern="1200">
+        <a:solidFill>
+          <a:schemeClr val="tx1"/>
+        </a:solidFill>
+        <a:latin typeface="+mn-lt"/>
+        <a:ea typeface="+mn-ea"/>
+        <a:cs typeface="+mn-cs"/>
+      </a:defRPr>
+    </a:lvl5pPr>
+    <a:lvl6pPr marL="2286000" algn="l" defTabSz="914400" rtl="0" eaLnBrk="1" latinLnBrk="0" hangingPunct="1">
+      <a:defRPr sz="1200" kern="1200">
+        <a:solidFill>
+          <a:schemeClr val="tx1"/>
+        </a:solidFill>
+        <a:latin typeface="+mn-lt"/>
+        <a:ea typeface="+mn-ea"/>
+        <a:cs typeface="+mn-cs"/>
+      </a:defRPr>
+    </a:lvl6pPr>
+    <a:lvl7pPr marL="2743200" algn="l" defTabSz="914400" rtl="0" eaLnBrk="1" latinLnBrk="0" hangingPunct="1">
+      <a:defRPr sz="1200" kern="1200">
+        <a:solidFill>
+          <a:schemeClr val="tx1"/>
+        </a:solidFill>
+        <a:latin typeface="+mn-lt"/>
+        <a:ea typeface="+mn-ea"/>
+        <a:cs typeface="+mn-cs"/>
+      </a:defRPr>
+    </a:lvl7pPr>
+    <a:lvl8pPr marL="3200400" algn="l" defTabSz="914400" rtl="0" eaLnBrk="1" latinLnBrk="0" hangingPunct="1">
+      <a:defRPr sz="1200" kern="1200">
+        <a:solidFill>
+          <a:schemeClr val="tx1"/>
+        </a:solidFill>
+        <a:latin typeface="+mn-lt"/>
+        <a:ea typeface="+mn-ea"/>
+        <a:cs typeface="+mn-cs"/>
+      </a:defRPr>
+    </a:lvl8pPr>
+    <a:lvl9pPr marL="3657600" algn="l" defTabSz="914400" rtl="0" eaLnBrk="1" latinLnBrk="0" hangingPunct="1">
+      <a:defRPr sz="1200" kern="1200">
+        <a:solidFill>
+          <a:schemeClr val="tx1"/>
+        </a:solidFill>
+        <a:latin typeface="+mn-lt"/>
+        <a:ea typeface="+mn-ea"/>
+        <a:cs typeface="+mn-cs"/>
+      </a:defRPr>
+    </a:lvl9pPr>
+  </p:notesStyle>
+</p:notesMaster>
+</file>
+
+<file path=ppt/notesSlides/notesSlide1.xml><?xml version="1.0" encoding="utf-8"?>
+<p:notes xmlns:a="http://schemas.openxmlformats.org/drawingml/2006/main" xmlns:r="http://schemas.openxmlformats.org/officeDocument/2006/relationships" xmlns:p="http://schemas.openxmlformats.org/presentationml/2006/main">
+  <p:cSld>
+    <p:spTree>
+      <p:nvGrpSpPr>
+        <p:cNvPr id="1" name=""/>
+        <p:cNvGrpSpPr/>
+        <p:nvPr/>
+      </p:nvGrpSpPr>
+      <p:grpSpPr>
+        <a:xfrm>
+          <a:off x="0" y="0"/>
+          <a:ext cx="0" cy="0"/>
+          <a:chOff x="0" y="0"/>
+          <a:chExt cx="0" cy="0"/>
+        </a:xfrm>
+      </p:grpSpPr>
+      <p:sp>
+        <p:nvSpPr>
+          <p:cNvPr id="2" name="Образ слайда 1"/>
+          <p:cNvSpPr>
+            <a:spLocks noGrp="1" noRot="1" noChangeAspect="1"/>
+          </p:cNvSpPr>
+          <p:nvPr>
+            <p:ph type="sldImg"/>
+          </p:nvPr>
+        </p:nvSpPr>
+        <p:spPr/>
+        <p:txBody>
+          <a:bodyPr/>
+          <a:lstStyle/>
+          <a:p>
+            <a:endParaRPr lang="ru-RU"/>
+          </a:p>
+        </p:txBody>
+      </p:sp>
+      <p:sp>
+        <p:nvSpPr>
+          <p:cNvPr id="3" name="Заметки 2"/>
+          <p:cNvSpPr>
+            <a:spLocks noGrp="1"/>
+          </p:cNvSpPr>
+          <p:nvPr>
+            <p:ph type="body" idx="1"/>
+          </p:nvPr>
+        </p:nvSpPr>
+        <p:spPr/>
+        <p:txBody>
+          <a:bodyPr/>
+          <a:lstStyle/>
+          <a:p>
+            <a:endParaRPr lang="ru-RU" dirty="0"/>
+          </a:p>
+        </p:txBody>
+      </p:sp>
+      <p:sp>
+        <p:nvSpPr>
+          <p:cNvPr id="4" name="Номер слайда 3"/>
+          <p:cNvSpPr>
+            <a:spLocks noGrp="1"/>
+          </p:cNvSpPr>
+          <p:nvPr>
+            <p:ph type="sldNum" sz="quarter" idx="5"/>
+          </p:nvPr>
+        </p:nvSpPr>
+        <p:spPr/>
+        <p:txBody>
+          <a:bodyPr/>
+          <a:lstStyle/>
+          <a:p>
+            <a:fld id="{83F01674-9CE6-48EA-994F-300955615A5B}" type="slidenum">
+              <a:rPr lang="ru-RU" smtClean="0"/>
+              <a:t>3</a:t>
+            </a:fld>
+            <a:endParaRPr lang="ru-RU"/>
+          </a:p>
+        </p:txBody>
+      </p:sp>
+    </p:spTree>
+    <p:extLst>
+      <p:ext uri="{BB962C8B-B14F-4D97-AF65-F5344CB8AC3E}">
+        <p14:creationId xmlns:p14="http://schemas.microsoft.com/office/powerpoint/2010/main" val="3173455750"/>
+      </p:ext>
+    </p:extLst>
+  </p:cSld>
+  <p:clrMapOvr>
+    <a:masterClrMapping/>
+  </p:clrMapOvr>
+</p:notes>
+</file>
+
+<file path=ppt/notesSlides/notesSlide2.xml><?xml version="1.0" encoding="utf-8"?>
+<p:notes xmlns:a="http://schemas.openxmlformats.org/drawingml/2006/main" xmlns:r="http://schemas.openxmlformats.org/officeDocument/2006/relationships" xmlns:p="http://schemas.openxmlformats.org/presentationml/2006/main">
+  <p:cSld>
+    <p:spTree>
+      <p:nvGrpSpPr>
+        <p:cNvPr id="1" name=""/>
+        <p:cNvGrpSpPr/>
+        <p:nvPr/>
+      </p:nvGrpSpPr>
+      <p:grpSpPr>
+        <a:xfrm>
+          <a:off x="0" y="0"/>
+          <a:ext cx="0" cy="0"/>
+          <a:chOff x="0" y="0"/>
+          <a:chExt cx="0" cy="0"/>
+        </a:xfrm>
+      </p:grpSpPr>
+      <p:sp>
+        <p:nvSpPr>
+          <p:cNvPr id="2" name="Образ слайда 1"/>
+          <p:cNvSpPr>
+            <a:spLocks noGrp="1" noRot="1" noChangeAspect="1"/>
+          </p:cNvSpPr>
+          <p:nvPr>
+            <p:ph type="sldImg"/>
+          </p:nvPr>
+        </p:nvSpPr>
+        <p:spPr/>
+      </p:sp>
+      <p:sp>
+        <p:nvSpPr>
+          <p:cNvPr id="3" name="Заметки 2"/>
+          <p:cNvSpPr>
+            <a:spLocks noGrp="1"/>
+          </p:cNvSpPr>
+          <p:nvPr>
+            <p:ph type="body" idx="1"/>
+          </p:nvPr>
+        </p:nvSpPr>
+        <p:spPr/>
+        <p:txBody>
+          <a:bodyPr/>
+          <a:lstStyle/>
+          <a:p>
+            <a:endParaRPr lang="ru-RU" dirty="0"/>
+          </a:p>
+        </p:txBody>
+      </p:sp>
+      <p:sp>
+        <p:nvSpPr>
+          <p:cNvPr id="4" name="Номер слайда 3"/>
+          <p:cNvSpPr>
+            <a:spLocks noGrp="1"/>
+          </p:cNvSpPr>
+          <p:nvPr>
+            <p:ph type="sldNum" sz="quarter" idx="5"/>
+          </p:nvPr>
+        </p:nvSpPr>
+        <p:spPr/>
+        <p:txBody>
+          <a:bodyPr/>
+          <a:lstStyle/>
+          <a:p>
+            <a:fld id="{83F01674-9CE6-48EA-994F-300955615A5B}" type="slidenum">
+              <a:rPr lang="ru-RU" smtClean="0"/>
+              <a:t>8</a:t>
+            </a:fld>
+            <a:endParaRPr lang="ru-RU"/>
+          </a:p>
+        </p:txBody>
+      </p:sp>
+    </p:spTree>
+    <p:extLst>
+      <p:ext uri="{BB962C8B-B14F-4D97-AF65-F5344CB8AC3E}">
+        <p14:creationId xmlns:p14="http://schemas.microsoft.com/office/powerpoint/2010/main" val="1634341595"/>
+      </p:ext>
+    </p:extLst>
+  </p:cSld>
+  <p:clrMapOvr>
+    <a:masterClrMapping/>
+  </p:clrMapOvr>
+</p:notes>
+</file>
+
 <file path=ppt/slideLayouts/slideLayout1.xml><?xml version="1.0" encoding="utf-8"?>
 <p:sldLayout xmlns:a="http://schemas.openxmlformats.org/drawingml/2006/main" xmlns:r="http://schemas.openxmlformats.org/officeDocument/2006/relationships" xmlns:p="http://schemas.openxmlformats.org/presentationml/2006/main" type="title" preserve="1">
   <p:cSld name="Титульный слайд">
@@ -269,7 +796,7 @@
           <a:p>
             <a:fld id="{F77A7811-AD34-41EE-8CC1-398635206704}" type="datetimeFigureOut">
               <a:rPr lang="ru-RU" smtClean="0"/>
-              <a:t>02.06.2026</a:t>
+              <a:t>11.06.2026</a:t>
             </a:fld>
             <a:endParaRPr lang="ru-RU"/>
           </a:p>
@@ -467,7 +994,7 @@
           <a:p>
             <a:fld id="{F77A7811-AD34-41EE-8CC1-398635206704}" type="datetimeFigureOut">
               <a:rPr lang="ru-RU" smtClean="0"/>
-              <a:t>02.06.2026</a:t>
+              <a:t>11.06.2026</a:t>
             </a:fld>
             <a:endParaRPr lang="ru-RU"/>
           </a:p>
@@ -675,7 +1202,7 @@
           <a:p>
             <a:fld id="{F77A7811-AD34-41EE-8CC1-398635206704}" type="datetimeFigureOut">
               <a:rPr lang="ru-RU" smtClean="0"/>
-              <a:t>02.06.2026</a:t>
+              <a:t>11.06.2026</a:t>
             </a:fld>
             <a:endParaRPr lang="ru-RU"/>
           </a:p>
@@ -873,7 +1400,7 @@
           <a:p>
             <a:fld id="{F77A7811-AD34-41EE-8CC1-398635206704}" type="datetimeFigureOut">
               <a:rPr lang="ru-RU" smtClean="0"/>
-              <a:t>02.06.2026</a:t>
+              <a:t>11.06.2026</a:t>
             </a:fld>
             <a:endParaRPr lang="ru-RU"/>
           </a:p>
@@ -1148,7 +1675,7 @@
           <a:p>
             <a:fld id="{F77A7811-AD34-41EE-8CC1-398635206704}" type="datetimeFigureOut">
               <a:rPr lang="ru-RU" smtClean="0"/>
-              <a:t>02.06.2026</a:t>
+              <a:t>11.06.2026</a:t>
             </a:fld>
             <a:endParaRPr lang="ru-RU"/>
           </a:p>
@@ -1413,7 +1940,7 @@
           <a:p>
             <a:fld id="{F77A7811-AD34-41EE-8CC1-398635206704}" type="datetimeFigureOut">
               <a:rPr lang="ru-RU" smtClean="0"/>
-              <a:t>02.06.2026</a:t>
+              <a:t>11.06.2026</a:t>
             </a:fld>
             <a:endParaRPr lang="ru-RU"/>
           </a:p>
@@ -1825,7 +2352,7 @@
           <a:p>
             <a:fld id="{F77A7811-AD34-41EE-8CC1-398635206704}" type="datetimeFigureOut">
               <a:rPr lang="ru-RU" smtClean="0"/>
-              <a:t>02.06.2026</a:t>
+              <a:t>11.06.2026</a:t>
             </a:fld>
             <a:endParaRPr lang="ru-RU"/>
           </a:p>
@@ -1966,7 +2493,7 @@
           <a:p>
             <a:fld id="{F77A7811-AD34-41EE-8CC1-398635206704}" type="datetimeFigureOut">
               <a:rPr lang="ru-RU" smtClean="0"/>
-              <a:t>02.06.2026</a:t>
+              <a:t>11.06.2026</a:t>
             </a:fld>
             <a:endParaRPr lang="ru-RU"/>
           </a:p>
@@ -2079,7 +2606,7 @@
           <a:p>
             <a:fld id="{F77A7811-AD34-41EE-8CC1-398635206704}" type="datetimeFigureOut">
               <a:rPr lang="ru-RU" smtClean="0"/>
-              <a:t>02.06.2026</a:t>
+              <a:t>11.06.2026</a:t>
             </a:fld>
             <a:endParaRPr lang="ru-RU"/>
           </a:p>
@@ -2390,7 +2917,7 @@
           <a:p>
             <a:fld id="{F77A7811-AD34-41EE-8CC1-398635206704}" type="datetimeFigureOut">
               <a:rPr lang="ru-RU" smtClean="0"/>
-              <a:t>02.06.2026</a:t>
+              <a:t>11.06.2026</a:t>
             </a:fld>
             <a:endParaRPr lang="ru-RU"/>
           </a:p>
@@ -2678,7 +3205,7 @@
           <a:p>
             <a:fld id="{F77A7811-AD34-41EE-8CC1-398635206704}" type="datetimeFigureOut">
               <a:rPr lang="ru-RU" smtClean="0"/>
-              <a:t>02.06.2026</a:t>
+              <a:t>11.06.2026</a:t>
             </a:fld>
             <a:endParaRPr lang="ru-RU"/>
           </a:p>
@@ -2919,7 +3446,7 @@
           <a:p>
             <a:fld id="{F77A7811-AD34-41EE-8CC1-398635206704}" type="datetimeFigureOut">
               <a:rPr lang="ru-RU" smtClean="0"/>
-              <a:t>02.06.2026</a:t>
+              <a:t>11.06.2026</a:t>
             </a:fld>
             <a:endParaRPr lang="ru-RU"/>
           </a:p>
@@ -4003,7 +4530,7 @@
                 <a:latin typeface="Bicubik" panose="02000503020000020004" pitchFamily="50" charset="0"/>
                 <a:cs typeface="Times New Roman" panose="02020603050405020304" pitchFamily="18" charset="0"/>
               </a:rPr>
-              <a:t>студент группы ****</a:t>
+              <a:t>студент группы 0907-26</a:t>
             </a:r>
           </a:p>
           <a:p>
@@ -4021,7 +4548,7 @@
                 <a:latin typeface="Bicubik" panose="02000503020000020004" pitchFamily="50" charset="0"/>
                 <a:cs typeface="Times New Roman" panose="02020603050405020304" pitchFamily="18" charset="0"/>
               </a:rPr>
-              <a:t>Фамилия Имя Отчество</a:t>
+              <a:t>Яковлев Илья Александрович</a:t>
             </a:r>
             <a:endParaRPr lang="en-US" sz="1200" cap="none" dirty="0">
               <a:effectLst/>
@@ -4062,7 +4589,7 @@
                 <a:latin typeface="Bicubik" panose="02000503020000020004" pitchFamily="50" charset="0"/>
                 <a:cs typeface="Times New Roman" panose="02020603050405020304" pitchFamily="18" charset="0"/>
               </a:rPr>
-              <a:t>Фамилия Имя Отчество</a:t>
+              <a:t>Муратов Амир Альбертович</a:t>
             </a:r>
             <a:endParaRPr lang="en-US" sz="1200" cap="none" dirty="0">
               <a:effectLst/>
@@ -4474,12 +5001,12 @@
         </p:spPr>
         <p:txBody>
           <a:bodyPr numCol="2" spcCol="720000">
-            <a:normAutofit/>
+            <a:normAutofit lnSpcReduction="10000"/>
           </a:bodyPr>
           <a:lstStyle/>
           <a:p>
             <a:r>
-              <a:rPr lang="ru-RU" sz="2000" b="1" dirty="0">
+              <a:rPr lang="ru-RU" sz="2700" b="1" dirty="0">
                 <a:latin typeface="Bicubik" panose="02000503020000020004" pitchFamily="50" charset="0"/>
               </a:rPr>
               <a:t>Достоинства</a:t>
@@ -4487,33 +5014,27 @@
           </a:p>
           <a:p>
             <a:r>
-              <a:rPr lang="ru-RU" sz="1400" dirty="0"/>
-              <a:t>Полная автоматизация записи – исключены конфликты, самозапись 24/7.</a:t>
-            </a:r>
-          </a:p>
-          <a:p>
-            <a:r>
-              <a:rPr lang="ru-RU" sz="1400" dirty="0"/>
-              <a:t>Ролевая модель – гибкое разграничение прав для 4 типов пользователей.</a:t>
-            </a:r>
-          </a:p>
-          <a:p>
-            <a:r>
-              <a:rPr lang="ru-RU" sz="1400" dirty="0"/>
-              <a:t>Геймификация – ачивки повышают лояльность пациентов.</a:t>
-            </a:r>
-            <a:endParaRPr lang="en-US" sz="1400" dirty="0"/>
-          </a:p>
-          <a:p>
-            <a:r>
-              <a:rPr lang="ru-RU" sz="1400" dirty="0"/>
-              <a:t>Адаптивный интерфейс – корректная работа на мобильных устройствах.</a:t>
-            </a:r>
-          </a:p>
-          <a:p>
-            <a:endParaRPr lang="ru-RU" sz="1400" dirty="0">
-              <a:latin typeface="Bicubik" panose="02000503020000020004" pitchFamily="50" charset="0"/>
-            </a:endParaRPr>
+              <a:rPr lang="ru-RU" sz="1900" dirty="0"/>
+              <a:t>Полная автоматизация записи – исключены конфликты, самозапись 24/7</a:t>
+            </a:r>
+          </a:p>
+          <a:p>
+            <a:r>
+              <a:rPr lang="ru-RU" sz="1900" dirty="0"/>
+              <a:t>Ролевая модель – гибкое разграничение прав для 4 типов пользователей</a:t>
+            </a:r>
+          </a:p>
+          <a:p>
+            <a:r>
+              <a:rPr lang="ru-RU" sz="1900" dirty="0"/>
+              <a:t>Геймификация – ачивки повышают лояльность пациентов</a:t>
+            </a:r>
+          </a:p>
+          <a:p>
+            <a:r>
+              <a:rPr lang="ru-RU" sz="1900" dirty="0"/>
+              <a:t>Адаптивный интерфейс – корректная работа на мобильных устройствах</a:t>
+            </a:r>
           </a:p>
           <a:p>
             <a:endParaRPr lang="ru-RU" sz="1400" dirty="0">
@@ -4551,7 +5072,7 @@
           </a:p>
           <a:p>
             <a:r>
-              <a:rPr lang="ru-RU" sz="2000" b="1" dirty="0">
+              <a:rPr lang="ru-RU" sz="2900" b="1" dirty="0">
                 <a:latin typeface="Bicubik" panose="02000503020000020004" pitchFamily="50" charset="0"/>
               </a:rPr>
               <a:t>Перспективы</a:t>
@@ -4559,52 +5080,45 @@
           </a:p>
           <a:p>
             <a:r>
-              <a:rPr lang="ru-RU" sz="1400" dirty="0"/>
-              <a:t>Интеграция с платёжными системами (онлайн-оплата услуг).</a:t>
-            </a:r>
-            <a:endParaRPr lang="ru-RU" sz="1400" dirty="0">
-              <a:latin typeface="Bicubik" panose="02000503020000020004" pitchFamily="50" charset="0"/>
-            </a:endParaRPr>
-          </a:p>
-          <a:p>
-            <a:r>
-              <a:rPr lang="en-US" sz="1400" dirty="0">
-                <a:latin typeface="Bicubik" panose="02000503020000020004"/>
-              </a:rPr>
-              <a:t>SMS-</a:t>
-            </a:r>
-            <a:r>
-              <a:rPr lang="ru-RU" sz="1400" dirty="0"/>
-              <a:t>напоминания о записи.</a:t>
-            </a:r>
-          </a:p>
-          <a:p>
-            <a:r>
-              <a:rPr lang="ru-RU" sz="1400" dirty="0"/>
+              <a:rPr lang="ru-RU" sz="2100" dirty="0"/>
+              <a:t>Интеграция с платёжными системами (онлайн-оплата услуг)</a:t>
+            </a:r>
+          </a:p>
+          <a:p>
+            <a:r>
+              <a:rPr lang="ru-RU" sz="2100" dirty="0"/>
+              <a:t>SMS-напоминания о записи</a:t>
+            </a:r>
+          </a:p>
+          <a:p>
+            <a:r>
+              <a:rPr lang="ru-RU" sz="2100" dirty="0"/>
               <a:t>Развёртывание в </a:t>
             </a:r>
             <a:r>
-              <a:rPr lang="ru-RU" sz="1400" dirty="0" err="1"/>
+              <a:rPr lang="ru-RU" sz="2100" dirty="0" err="1"/>
               <a:t>Docker</a:t>
             </a:r>
             <a:r>
-              <a:rPr lang="ru-RU" sz="1400" dirty="0"/>
-              <a:t> и облачный хостинг.</a:t>
-            </a:r>
-          </a:p>
-          <a:p>
-            <a:r>
-              <a:rPr lang="ru-RU" sz="1400" dirty="0"/>
+              <a:rPr lang="ru-RU" sz="2100" dirty="0"/>
+              <a:t> и облачный хостинг</a:t>
+            </a:r>
+          </a:p>
+          <a:p>
+            <a:r>
+              <a:rPr lang="ru-RU" sz="2100" dirty="0"/>
               <a:t>Мобильное приложение на </a:t>
             </a:r>
             <a:r>
-              <a:rPr lang="en-US" sz="1400" dirty="0">
-                <a:latin typeface="Bicubik" panose="02000503020000020004"/>
-              </a:rPr>
-              <a:t>Flutter.</a:t>
-            </a:r>
-          </a:p>
-          <a:p>
+              <a:rPr lang="ru-RU" sz="2100" dirty="0" err="1"/>
+              <a:t>Flutter</a:t>
+            </a:r>
+            <a:endParaRPr lang="ru-RU" sz="2100" dirty="0"/>
+          </a:p>
+          <a:p>
+            <a:pPr marL="0" indent="0">
+              <a:buNone/>
+            </a:pPr>
             <a:endParaRPr lang="ru-RU" sz="2000" b="1" dirty="0">
               <a:latin typeface="Bicubik" panose="02000503020000020004" pitchFamily="50" charset="0"/>
             </a:endParaRPr>
@@ -5332,14 +5846,14 @@
           <p:nvPr/>
         </p:nvPicPr>
         <p:blipFill>
-          <a:blip r:embed="rId2">
+          <a:blip r:embed="rId3">
             <a:alphaModFix amt="50000"/>
             <a:extLst>
               <a:ext uri="{28A0092B-C50C-407E-A947-70E740481C1C}">
                 <a14:useLocalDpi xmlns:a14="http://schemas.microsoft.com/office/drawing/2010/main" val="0"/>
               </a:ext>
               <a:ext uri="{96DAC541-7B7A-43D3-8B79-37D633B846F1}">
-                <asvg:svgBlip xmlns:asvg="http://schemas.microsoft.com/office/drawing/2016/SVG/main" r:embed="rId3"/>
+                <asvg:svgBlip xmlns:asvg="http://schemas.microsoft.com/office/drawing/2016/SVG/main" r:embed="rId4"/>
               </a:ext>
             </a:extLst>
           </a:blip>
@@ -5372,13 +5886,13 @@
           <p:nvPr/>
         </p:nvPicPr>
         <p:blipFill>
-          <a:blip r:embed="rId4">
+          <a:blip r:embed="rId5">
             <a:extLst>
               <a:ext uri="{28A0092B-C50C-407E-A947-70E740481C1C}">
                 <a14:useLocalDpi xmlns:a14="http://schemas.microsoft.com/office/drawing/2010/main" val="0"/>
               </a:ext>
               <a:ext uri="{96DAC541-7B7A-43D3-8B79-37D633B846F1}">
-                <asvg:svgBlip xmlns:asvg="http://schemas.microsoft.com/office/drawing/2016/SVG/main" r:embed="rId5"/>
+                <asvg:svgBlip xmlns:asvg="http://schemas.microsoft.com/office/drawing/2016/SVG/main" r:embed="rId6"/>
               </a:ext>
             </a:extLst>
           </a:blip>
@@ -5402,43 +5916,6 @@
             <a:extLst>
               <a:ext uri="{FF2B5EF4-FFF2-40B4-BE49-F238E27FC236}">
                 <a16:creationId xmlns:a16="http://schemas.microsoft.com/office/drawing/2014/main" id="{6423F581-7307-4DF4-87D3-1667484E7A0E}"/>
-              </a:ext>
-            </a:extLst>
-          </p:cNvPr>
-          <p:cNvPicPr>
-            <a:picLocks noChangeAspect="1"/>
-          </p:cNvPicPr>
-          <p:nvPr/>
-        </p:nvPicPr>
-        <p:blipFill>
-          <a:blip r:embed="rId6">
-            <a:alphaModFix amt="34000"/>
-            <a:extLst>
-              <a:ext uri="{28A0092B-C50C-407E-A947-70E740481C1C}">
-                <a14:useLocalDpi xmlns:a14="http://schemas.microsoft.com/office/drawing/2010/main" val="0"/>
-              </a:ext>
-            </a:extLst>
-          </a:blip>
-          <a:stretch>
-            <a:fillRect/>
-          </a:stretch>
-        </p:blipFill>
-        <p:spPr>
-          <a:xfrm rot="20266875">
-            <a:off x="10289712" y="3637756"/>
-            <a:ext cx="2128176" cy="2128176"/>
-          </a:xfrm>
-          <a:prstGeom prst="rect">
-            <a:avLst/>
-          </a:prstGeom>
-        </p:spPr>
-      </p:pic>
-      <p:pic>
-        <p:nvPicPr>
-          <p:cNvPr id="17" name="Рисунок 16">
-            <a:extLst>
-              <a:ext uri="{FF2B5EF4-FFF2-40B4-BE49-F238E27FC236}">
-                <a16:creationId xmlns:a16="http://schemas.microsoft.com/office/drawing/2014/main" id="{8539FDB4-9E44-4A6E-9F89-4A0802D11709}"/>
               </a:ext>
             </a:extLst>
           </p:cNvPr>
@@ -5449,7 +5926,7 @@
         </p:nvPicPr>
         <p:blipFill>
           <a:blip r:embed="rId7">
-            <a:alphaModFix amt="56000"/>
+            <a:alphaModFix amt="34000"/>
             <a:extLst>
               <a:ext uri="{28A0092B-C50C-407E-A947-70E740481C1C}">
                 <a14:useLocalDpi xmlns:a14="http://schemas.microsoft.com/office/drawing/2010/main" val="0"/>
@@ -5461,6 +5938,43 @@
           </a:stretch>
         </p:blipFill>
         <p:spPr>
+          <a:xfrm rot="20266875">
+            <a:off x="10289712" y="3637756"/>
+            <a:ext cx="2128176" cy="2128176"/>
+          </a:xfrm>
+          <a:prstGeom prst="rect">
+            <a:avLst/>
+          </a:prstGeom>
+        </p:spPr>
+      </p:pic>
+      <p:pic>
+        <p:nvPicPr>
+          <p:cNvPr id="17" name="Рисунок 16">
+            <a:extLst>
+              <a:ext uri="{FF2B5EF4-FFF2-40B4-BE49-F238E27FC236}">
+                <a16:creationId xmlns:a16="http://schemas.microsoft.com/office/drawing/2014/main" id="{8539FDB4-9E44-4A6E-9F89-4A0802D11709}"/>
+              </a:ext>
+            </a:extLst>
+          </p:cNvPr>
+          <p:cNvPicPr>
+            <a:picLocks noChangeAspect="1"/>
+          </p:cNvPicPr>
+          <p:nvPr/>
+        </p:nvPicPr>
+        <p:blipFill>
+          <a:blip r:embed="rId8">
+            <a:alphaModFix amt="56000"/>
+            <a:extLst>
+              <a:ext uri="{28A0092B-C50C-407E-A947-70E740481C1C}">
+                <a14:useLocalDpi xmlns:a14="http://schemas.microsoft.com/office/drawing/2010/main" val="0"/>
+              </a:ext>
+            </a:extLst>
+          </a:blip>
+          <a:stretch>
+            <a:fillRect/>
+          </a:stretch>
+        </p:blipFill>
+        <p:spPr>
           <a:xfrm rot="1401891">
             <a:off x="-611342" y="5930793"/>
             <a:ext cx="1854412" cy="1854412"/>
@@ -5555,24 +6069,21 @@
             <a:endParaRPr lang="ru-RU" sz="7200" dirty="0"/>
           </a:p>
           <a:p>
-            <a:pPr algn="just"/>
             <a:r>
               <a:rPr lang="ru-RU" sz="7200" dirty="0"/>
-              <a:t>В существующей системе учёта заявок процессы ведутся вручную (Excel/бумажные журналы).</a:t>
-            </a:r>
-          </a:p>
-          <a:p>
-            <a:pPr algn="just"/>
+              <a:t>Бумажные журналы и Excel-таблицы → двойные записи, потеря истории лечения</a:t>
+            </a:r>
+          </a:p>
+          <a:p>
             <a:r>
               <a:rPr lang="ru-RU" sz="7200" dirty="0"/>
-              <a:t>Высокая вероятность ошибок, потери данных, низкая скорость обработки.</a:t>
-            </a:r>
-          </a:p>
-          <a:p>
-            <a:pPr algn="just"/>
+              <a:t>Нет самозаписи пациентов 24/7</a:t>
+            </a:r>
+          </a:p>
+          <a:p>
             <a:r>
               <a:rPr lang="ru-RU" sz="7200" dirty="0"/>
-              <a:t>Отсутствие единого интерфейса для клиентов и сотрудников.</a:t>
+              <a:t>Низкая вовлечённость пациентов (нет системы поощрений)</a:t>
             </a:r>
           </a:p>
           <a:p>
@@ -5605,8 +6116,17 @@
             <a:pPr algn="just"/>
             <a:r>
               <a:rPr lang="ru-RU" sz="7200" dirty="0"/>
-              <a:t>Разработать веб-приложение, автоматизирующее приём, регистрацию и отслеживание статуса заявок клиентов.</a:t>
-            </a:r>
+              <a:t>Разработать АИС для стоматологической клиники с онлайн-записью, электронной историей лечения, ролевой моделью (пациент, врач, менеджер, администратор) и системой достижений</a:t>
+            </a:r>
+            <a:r>
+              <a:rPr lang="en-US" sz="7200" dirty="0"/>
+              <a:t> </a:t>
+            </a:r>
+            <a:r>
+              <a:rPr lang="ru-RU" sz="7200" dirty="0"/>
+              <a:t>для мотивирования клиентов</a:t>
+            </a:r>
+            <a:endParaRPr lang="en-US" sz="7200" dirty="0"/>
           </a:p>
           <a:p>
             <a:pPr marL="0" indent="0" algn="just">
@@ -5623,59 +6143,57 @@
             <a:endParaRPr lang="ru-RU" sz="7200" dirty="0"/>
           </a:p>
           <a:p>
-            <a:pPr algn="just"/>
+            <a:pPr marL="0" indent="0">
+              <a:buNone/>
+            </a:pPr>
             <a:r>
               <a:rPr lang="ru-RU" sz="7200" dirty="0"/>
-              <a:t>Проанализировать предметную область и требования пользователей.</a:t>
-            </a:r>
-          </a:p>
-          <a:p>
-            <a:pPr algn="just"/>
+              <a:t>1. Проанализировать предметную область</a:t>
+            </a:r>
+          </a:p>
+          <a:p>
+            <a:pPr marL="0" indent="0">
+              <a:buNone/>
+            </a:pPr>
             <a:r>
               <a:rPr lang="ru-RU" sz="7200" dirty="0"/>
-              <a:t>Спроектировать базу данных для хранения информации о заявках.</a:t>
-            </a:r>
-          </a:p>
-          <a:p>
-            <a:pPr algn="just"/>
+              <a:t>2. Спроектировать базу данных (9 таблиц)</a:t>
+            </a:r>
+          </a:p>
+          <a:p>
+            <a:pPr marL="0" indent="0">
+              <a:buNone/>
+            </a:pPr>
             <a:r>
               <a:rPr lang="ru-RU" sz="7200" dirty="0"/>
-              <a:t>Разработать клиентскую часть (интерфейс для клиента и менеджера).</a:t>
-            </a:r>
-          </a:p>
-          <a:p>
-            <a:pPr algn="just"/>
+              <a:t>3. Реализовать бэкенд на </a:t>
+            </a:r>
+            <a:r>
+              <a:rPr lang="ru-RU" sz="7200" dirty="0" err="1"/>
+              <a:t>Flask</a:t>
+            </a:r>
             <a:r>
               <a:rPr lang="ru-RU" sz="7200" dirty="0"/>
-              <a:t>Реализовать серверную логику на C#.</a:t>
-            </a:r>
-          </a:p>
-          <a:p>
-            <a:pPr algn="just"/>
+              <a:t>, фронтенд с адаптивным дизайном</a:t>
+            </a:r>
+          </a:p>
+          <a:p>
+            <a:pPr marL="0" indent="0">
+              <a:buNone/>
+            </a:pPr>
             <a:r>
               <a:rPr lang="ru-RU" sz="7200" dirty="0"/>
-              <a:t>Провести тестирование и развернуть приложение с помощью </a:t>
-            </a:r>
-            <a:r>
-              <a:rPr lang="ru-RU" sz="7200" dirty="0" err="1"/>
-              <a:t>nginx</a:t>
-            </a:r>
+              <a:t>4. Внедрить механизм ачивок</a:t>
+            </a:r>
+          </a:p>
+          <a:p>
+            <a:pPr marL="0" indent="0">
+              <a:buNone/>
+            </a:pPr>
             <a:r>
               <a:rPr lang="ru-RU" sz="7200" dirty="0"/>
-              <a:t> + </a:t>
-            </a:r>
-            <a:r>
-              <a:rPr lang="ru-RU" sz="7200" dirty="0" err="1"/>
-              <a:t>CloudPub</a:t>
-            </a:r>
-            <a:r>
-              <a:rPr lang="ru-RU" sz="7200" dirty="0"/>
-              <a:t>.</a:t>
-            </a:r>
-          </a:p>
-          <a:p>
-            <a:pPr algn="just"/>
-            <a:endParaRPr lang="ru-RU" dirty="0"/>
+              <a:t>5. Провести тестирование</a:t>
+            </a:r>
           </a:p>
         </p:txBody>
       </p:sp>
@@ -5903,12 +6421,51 @@
           </a:p>
         </p:txBody>
       </p:sp>
+      <p:sp>
+        <p:nvSpPr>
+          <p:cNvPr id="8" name="TextBox 7">
+            <a:extLst>
+              <a:ext uri="{FF2B5EF4-FFF2-40B4-BE49-F238E27FC236}">
+                <a16:creationId xmlns:a16="http://schemas.microsoft.com/office/drawing/2014/main" id="{27F615B5-FE5F-4BDD-91FA-628ED6CE85C2}"/>
+              </a:ext>
+            </a:extLst>
+          </p:cNvPr>
+          <p:cNvSpPr txBox="1"/>
+          <p:nvPr/>
+        </p:nvSpPr>
+        <p:spPr>
+          <a:xfrm>
+            <a:off x="3481864" y="5812300"/>
+            <a:ext cx="5469271" cy="276999"/>
+          </a:xfrm>
+          <a:prstGeom prst="rect">
+            <a:avLst/>
+          </a:prstGeom>
+          <a:noFill/>
+        </p:spPr>
+        <p:txBody>
+          <a:bodyPr wrap="square" rtlCol="0">
+            <a:spAutoFit/>
+          </a:bodyPr>
+          <a:lstStyle/>
+          <a:p>
+            <a:pPr algn="ctr"/>
+            <a:r>
+              <a:rPr lang="ru-RU" sz="1200" dirty="0">
+                <a:latin typeface="Bicubik" panose="02000503020000020004" pitchFamily="50" charset="0"/>
+                <a:cs typeface="Times New Roman" panose="02020603050405020304" pitchFamily="18" charset="0"/>
+              </a:rPr>
+              <a:t>Рисунок 1 – Организационная структура отдела</a:t>
+            </a:r>
+          </a:p>
+        </p:txBody>
+      </p:sp>
       <p:pic>
         <p:nvPicPr>
-          <p:cNvPr id="7" name="Рисунок 6">
-            <a:extLst>
-              <a:ext uri="{FF2B5EF4-FFF2-40B4-BE49-F238E27FC236}">
-                <a16:creationId xmlns:a16="http://schemas.microsoft.com/office/drawing/2014/main" id="{9A7A0E14-C88C-4EFF-8BC8-FC5B41D09EDC}"/>
+          <p:cNvPr id="9" name="Рисунок 8" descr="Изображение выглядит как текст, диаграмма, снимок экрана, Шрифт&#10;&#10;Содержимое, созданное искусственным интеллектом, может быть неверным.">
+            <a:extLst>
+              <a:ext uri="{FF2B5EF4-FFF2-40B4-BE49-F238E27FC236}">
+                <a16:creationId xmlns:a16="http://schemas.microsoft.com/office/drawing/2014/main" id="{4964124B-403F-3B09-340B-8B3ACF2E24E4}"/>
               </a:ext>
             </a:extLst>
           </p:cNvPr>
@@ -5918,65 +6475,21 @@
           <p:nvPr/>
         </p:nvPicPr>
         <p:blipFill>
-          <a:blip r:embed="rId8">
-            <a:extLst>
-              <a:ext uri="{28A0092B-C50C-407E-A947-70E740481C1C}">
-                <a14:useLocalDpi xmlns:a14="http://schemas.microsoft.com/office/drawing/2010/main" val="0"/>
-              </a:ext>
-            </a:extLst>
-          </a:blip>
-          <a:srcRect/>
-          <a:stretch/>
+          <a:blip r:embed="rId8"/>
+          <a:stretch>
+            <a:fillRect/>
+          </a:stretch>
         </p:blipFill>
         <p:spPr>
           <a:xfrm>
-            <a:off x="2828075" y="1464889"/>
-            <a:ext cx="6535849" cy="4092010"/>
+            <a:off x="2961556" y="1300785"/>
+            <a:ext cx="6268888" cy="4420218"/>
           </a:xfrm>
           <a:prstGeom prst="rect">
             <a:avLst/>
           </a:prstGeom>
         </p:spPr>
       </p:pic>
-      <p:sp>
-        <p:nvSpPr>
-          <p:cNvPr id="8" name="TextBox 7">
-            <a:extLst>
-              <a:ext uri="{FF2B5EF4-FFF2-40B4-BE49-F238E27FC236}">
-                <a16:creationId xmlns:a16="http://schemas.microsoft.com/office/drawing/2014/main" id="{27F615B5-FE5F-4BDD-91FA-628ED6CE85C2}"/>
-              </a:ext>
-            </a:extLst>
-          </p:cNvPr>
-          <p:cNvSpPr txBox="1"/>
-          <p:nvPr/>
-        </p:nvSpPr>
-        <p:spPr>
-          <a:xfrm>
-            <a:off x="3481864" y="5812300"/>
-            <a:ext cx="5469271" cy="276999"/>
-          </a:xfrm>
-          <a:prstGeom prst="rect">
-            <a:avLst/>
-          </a:prstGeom>
-          <a:noFill/>
-        </p:spPr>
-        <p:txBody>
-          <a:bodyPr wrap="square" rtlCol="0">
-            <a:spAutoFit/>
-          </a:bodyPr>
-          <a:lstStyle/>
-          <a:p>
-            <a:pPr algn="ctr"/>
-            <a:r>
-              <a:rPr lang="ru-RU" sz="1200" dirty="0">
-                <a:latin typeface="Bicubik" panose="02000503020000020004" pitchFamily="50" charset="0"/>
-                <a:cs typeface="Times New Roman" panose="02020603050405020304" pitchFamily="18" charset="0"/>
-              </a:rPr>
-              <a:t>Рисунок 1 – Организационная структура отдела</a:t>
-            </a:r>
-          </a:p>
-        </p:txBody>
-      </p:sp>
     </p:spTree>
     <p:extLst>
       <p:ext uri="{BB962C8B-B14F-4D97-AF65-F5344CB8AC3E}">
@@ -6181,7 +6694,7 @@
         </p:nvSpPr>
         <p:spPr>
           <a:xfrm>
-            <a:off x="312882" y="385022"/>
+            <a:off x="315864" y="192752"/>
             <a:ext cx="11566236" cy="1325563"/>
           </a:xfrm>
         </p:spPr>
@@ -6201,12 +6714,51 @@
           </a:p>
         </p:txBody>
       </p:sp>
+      <p:sp>
+        <p:nvSpPr>
+          <p:cNvPr id="8" name="TextBox 7">
+            <a:extLst>
+              <a:ext uri="{FF2B5EF4-FFF2-40B4-BE49-F238E27FC236}">
+                <a16:creationId xmlns:a16="http://schemas.microsoft.com/office/drawing/2014/main" id="{3C0C0E2E-A23D-4B52-9777-D14436F0372B}"/>
+              </a:ext>
+            </a:extLst>
+          </p:cNvPr>
+          <p:cNvSpPr txBox="1"/>
+          <p:nvPr/>
+        </p:nvSpPr>
+        <p:spPr>
+          <a:xfrm>
+            <a:off x="3352378" y="5904633"/>
+            <a:ext cx="5487244" cy="276999"/>
+          </a:xfrm>
+          <a:prstGeom prst="rect">
+            <a:avLst/>
+          </a:prstGeom>
+          <a:noFill/>
+        </p:spPr>
+        <p:txBody>
+          <a:bodyPr wrap="square" rtlCol="0">
+            <a:spAutoFit/>
+          </a:bodyPr>
+          <a:lstStyle/>
+          <a:p>
+            <a:pPr algn="ctr"/>
+            <a:r>
+              <a:rPr lang="ru-RU" sz="1200" dirty="0">
+                <a:latin typeface="Bicubik" panose="02000503020000020004" pitchFamily="50" charset="0"/>
+                <a:cs typeface="Times New Roman" panose="02020603050405020304" pitchFamily="18" charset="0"/>
+              </a:rPr>
+              <a:t>Рисунок 2 – Диаграмма вариантов использования</a:t>
+            </a:r>
+          </a:p>
+        </p:txBody>
+      </p:sp>
       <p:pic>
         <p:nvPicPr>
-          <p:cNvPr id="7" name="Рисунок 6">
-            <a:extLst>
-              <a:ext uri="{FF2B5EF4-FFF2-40B4-BE49-F238E27FC236}">
-                <a16:creationId xmlns:a16="http://schemas.microsoft.com/office/drawing/2014/main" id="{8BB28DDE-BF3D-413E-B8CA-FC62362FFB04}"/>
+          <p:cNvPr id="9" name="Рисунок 8" descr="Изображение выглядит как диаграмма, линия, круг, зарисовка&#10;&#10;Содержимое, созданное искусственным интеллектом, может быть неверным.">
+            <a:extLst>
+              <a:ext uri="{FF2B5EF4-FFF2-40B4-BE49-F238E27FC236}">
+                <a16:creationId xmlns:a16="http://schemas.microsoft.com/office/drawing/2014/main" id="{7893D9E9-EDE6-665D-263C-3357FCAD0FBA}"/>
               </a:ext>
             </a:extLst>
           </p:cNvPr>
@@ -6223,58 +6775,20 @@
               </a:ext>
             </a:extLst>
           </a:blip>
-          <a:srcRect/>
-          <a:stretch/>
+          <a:stretch>
+            <a:fillRect/>
+          </a:stretch>
         </p:blipFill>
         <p:spPr>
           <a:xfrm>
-            <a:off x="4537435" y="1447998"/>
-            <a:ext cx="3117130" cy="4361566"/>
+            <a:off x="3331180" y="1218891"/>
+            <a:ext cx="5529640" cy="4420218"/>
           </a:xfrm>
           <a:prstGeom prst="rect">
             <a:avLst/>
           </a:prstGeom>
         </p:spPr>
       </p:pic>
-      <p:sp>
-        <p:nvSpPr>
-          <p:cNvPr id="8" name="TextBox 7">
-            <a:extLst>
-              <a:ext uri="{FF2B5EF4-FFF2-40B4-BE49-F238E27FC236}">
-                <a16:creationId xmlns:a16="http://schemas.microsoft.com/office/drawing/2014/main" id="{3C0C0E2E-A23D-4B52-9777-D14436F0372B}"/>
-              </a:ext>
-            </a:extLst>
-          </p:cNvPr>
-          <p:cNvSpPr txBox="1"/>
-          <p:nvPr/>
-        </p:nvSpPr>
-        <p:spPr>
-          <a:xfrm>
-            <a:off x="3352378" y="5904633"/>
-            <a:ext cx="5487244" cy="276999"/>
-          </a:xfrm>
-          <a:prstGeom prst="rect">
-            <a:avLst/>
-          </a:prstGeom>
-          <a:noFill/>
-        </p:spPr>
-        <p:txBody>
-          <a:bodyPr wrap="square" rtlCol="0">
-            <a:spAutoFit/>
-          </a:bodyPr>
-          <a:lstStyle/>
-          <a:p>
-            <a:pPr algn="ctr"/>
-            <a:r>
-              <a:rPr lang="ru-RU" sz="1200" dirty="0">
-                <a:latin typeface="Bicubik" panose="02000503020000020004" pitchFamily="50" charset="0"/>
-                <a:cs typeface="Times New Roman" panose="02020603050405020304" pitchFamily="18" charset="0"/>
-              </a:rPr>
-              <a:t>Рисунок 2 – Диаграмма вариантов использования</a:t>
-            </a:r>
-          </a:p>
-        </p:txBody>
-      </p:sp>
     </p:spTree>
     <p:extLst>
       <p:ext uri="{BB962C8B-B14F-4D97-AF65-F5344CB8AC3E}">
@@ -6479,7 +6993,7 @@
         </p:nvSpPr>
         <p:spPr>
           <a:xfrm>
-            <a:off x="312882" y="385022"/>
+            <a:off x="312882" y="-174064"/>
             <a:ext cx="11566236" cy="1325563"/>
           </a:xfrm>
         </p:spPr>
@@ -6499,12 +7013,51 @@
           </a:p>
         </p:txBody>
       </p:sp>
+      <p:sp>
+        <p:nvSpPr>
+          <p:cNvPr id="8" name="TextBox 7">
+            <a:extLst>
+              <a:ext uri="{FF2B5EF4-FFF2-40B4-BE49-F238E27FC236}">
+                <a16:creationId xmlns:a16="http://schemas.microsoft.com/office/drawing/2014/main" id="{32CED4C2-F8C1-4459-88DC-9B58C327D3F9}"/>
+              </a:ext>
+            </a:extLst>
+          </p:cNvPr>
+          <p:cNvSpPr txBox="1"/>
+          <p:nvPr/>
+        </p:nvSpPr>
+        <p:spPr>
+          <a:xfrm>
+            <a:off x="2815606" y="6213146"/>
+            <a:ext cx="6560788" cy="307777"/>
+          </a:xfrm>
+          <a:prstGeom prst="rect">
+            <a:avLst/>
+          </a:prstGeom>
+          <a:noFill/>
+        </p:spPr>
+        <p:txBody>
+          <a:bodyPr wrap="square" rtlCol="0">
+            <a:spAutoFit/>
+          </a:bodyPr>
+          <a:lstStyle/>
+          <a:p>
+            <a:pPr algn="ctr"/>
+            <a:r>
+              <a:rPr lang="ru-RU" sz="1400" dirty="0">
+                <a:latin typeface="Bicubik" panose="02000503020000020004" pitchFamily="50" charset="0"/>
+                <a:cs typeface="Times New Roman" panose="02020603050405020304" pitchFamily="18" charset="0"/>
+              </a:rPr>
+              <a:t>Рисунок 3 – Диаграмма деятельности по функции «Записаться»</a:t>
+            </a:r>
+          </a:p>
+        </p:txBody>
+      </p:sp>
       <p:pic>
         <p:nvPicPr>
-          <p:cNvPr id="7" name="Рисунок 6">
-            <a:extLst>
-              <a:ext uri="{FF2B5EF4-FFF2-40B4-BE49-F238E27FC236}">
-                <a16:creationId xmlns:a16="http://schemas.microsoft.com/office/drawing/2014/main" id="{FBEA3CE7-D8F4-4816-96A5-BFDAEC6B0A5B}"/>
+          <p:cNvPr id="3" name="Рисунок 2" descr="Изображение выглядит как текст, снимок экрана, диаграмма, Параллельный&#10;&#10;Содержимое, созданное искусственным интеллектом, может быть неверным.">
+            <a:extLst>
+              <a:ext uri="{FF2B5EF4-FFF2-40B4-BE49-F238E27FC236}">
+                <a16:creationId xmlns:a16="http://schemas.microsoft.com/office/drawing/2014/main" id="{0705EDBF-6054-CB76-C106-36DC486C7C43}"/>
               </a:ext>
             </a:extLst>
           </p:cNvPr>
@@ -6521,58 +7074,20 @@
               </a:ext>
             </a:extLst>
           </a:blip>
-          <a:srcRect/>
-          <a:stretch/>
+          <a:stretch>
+            <a:fillRect/>
+          </a:stretch>
         </p:blipFill>
         <p:spPr>
           <a:xfrm>
-            <a:off x="4878058" y="1459131"/>
-            <a:ext cx="2435882" cy="4103525"/>
+            <a:off x="4518852" y="768701"/>
+            <a:ext cx="3154296" cy="5320598"/>
           </a:xfrm>
           <a:prstGeom prst="rect">
             <a:avLst/>
           </a:prstGeom>
         </p:spPr>
       </p:pic>
-      <p:sp>
-        <p:nvSpPr>
-          <p:cNvPr id="8" name="TextBox 7">
-            <a:extLst>
-              <a:ext uri="{FF2B5EF4-FFF2-40B4-BE49-F238E27FC236}">
-                <a16:creationId xmlns:a16="http://schemas.microsoft.com/office/drawing/2014/main" id="{32CED4C2-F8C1-4459-88DC-9B58C327D3F9}"/>
-              </a:ext>
-            </a:extLst>
-          </p:cNvPr>
-          <p:cNvSpPr txBox="1"/>
-          <p:nvPr/>
-        </p:nvSpPr>
-        <p:spPr>
-          <a:xfrm>
-            <a:off x="2815606" y="5826647"/>
-            <a:ext cx="6560788" cy="307777"/>
-          </a:xfrm>
-          <a:prstGeom prst="rect">
-            <a:avLst/>
-          </a:prstGeom>
-          <a:noFill/>
-        </p:spPr>
-        <p:txBody>
-          <a:bodyPr wrap="square" rtlCol="0">
-            <a:spAutoFit/>
-          </a:bodyPr>
-          <a:lstStyle/>
-          <a:p>
-            <a:pPr algn="ctr"/>
-            <a:r>
-              <a:rPr lang="ru-RU" sz="1400" dirty="0">
-                <a:latin typeface="Bicubik" panose="02000503020000020004" pitchFamily="50" charset="0"/>
-                <a:cs typeface="Times New Roman" panose="02020603050405020304" pitchFamily="18" charset="0"/>
-              </a:rPr>
-              <a:t>Рисунок 3 – Диаграмма деятельности по функции «Записаться»</a:t>
-            </a:r>
-          </a:p>
-        </p:txBody>
-      </p:sp>
     </p:spTree>
     <p:extLst>
       <p:ext uri="{BB962C8B-B14F-4D97-AF65-F5344CB8AC3E}">
@@ -6777,7 +7292,7 @@
         </p:nvSpPr>
         <p:spPr>
           <a:xfrm>
-            <a:off x="312882" y="385022"/>
+            <a:off x="312881" y="237287"/>
             <a:ext cx="11566236" cy="1325563"/>
           </a:xfrm>
         </p:spPr>
@@ -6797,12 +7312,51 @@
           </a:p>
         </p:txBody>
       </p:sp>
+      <p:sp>
+        <p:nvSpPr>
+          <p:cNvPr id="8" name="TextBox 7">
+            <a:extLst>
+              <a:ext uri="{FF2B5EF4-FFF2-40B4-BE49-F238E27FC236}">
+                <a16:creationId xmlns:a16="http://schemas.microsoft.com/office/drawing/2014/main" id="{EA7BD16B-7203-483D-8665-334B149B3414}"/>
+              </a:ext>
+            </a:extLst>
+          </p:cNvPr>
+          <p:cNvSpPr txBox="1"/>
+          <p:nvPr/>
+        </p:nvSpPr>
+        <p:spPr>
+          <a:xfrm>
+            <a:off x="4140756" y="6010461"/>
+            <a:ext cx="3929342" cy="307777"/>
+          </a:xfrm>
+          <a:prstGeom prst="rect">
+            <a:avLst/>
+          </a:prstGeom>
+          <a:noFill/>
+        </p:spPr>
+        <p:txBody>
+          <a:bodyPr wrap="square" rtlCol="0">
+            <a:spAutoFit/>
+          </a:bodyPr>
+          <a:lstStyle/>
+          <a:p>
+            <a:pPr algn="ctr"/>
+            <a:r>
+              <a:rPr lang="ru-RU" sz="1400" dirty="0">
+                <a:latin typeface="Bicubik" panose="02000503020000020004" pitchFamily="50" charset="0"/>
+                <a:cs typeface="Times New Roman" panose="02020603050405020304" pitchFamily="18" charset="0"/>
+              </a:rPr>
+              <a:t>Рисунок 4 – Диаграмма классов</a:t>
+            </a:r>
+          </a:p>
+        </p:txBody>
+      </p:sp>
       <p:pic>
         <p:nvPicPr>
-          <p:cNvPr id="7" name="Рисунок 6">
-            <a:extLst>
-              <a:ext uri="{FF2B5EF4-FFF2-40B4-BE49-F238E27FC236}">
-                <a16:creationId xmlns:a16="http://schemas.microsoft.com/office/drawing/2014/main" id="{B32BF6BC-B464-4D56-BD6A-92638C40CE5F}"/>
+          <p:cNvPr id="2" name="Рисунок 1">
+            <a:extLst>
+              <a:ext uri="{FF2B5EF4-FFF2-40B4-BE49-F238E27FC236}">
+                <a16:creationId xmlns:a16="http://schemas.microsoft.com/office/drawing/2014/main" id="{DC94F475-79BC-92EF-B252-2EEB0BF22BD6}"/>
               </a:ext>
             </a:extLst>
           </p:cNvPr>
@@ -6811,60 +7365,27 @@
           </p:cNvPicPr>
           <p:nvPr/>
         </p:nvPicPr>
-        <p:blipFill rotWithShape="1">
-          <a:blip r:embed="rId8"/>
-          <a:srcRect b="8387"/>
+        <p:blipFill>
+          <a:blip r:embed="rId8">
+            <a:extLst>
+              <a:ext uri="{28A0092B-C50C-407E-A947-70E740481C1C}">
+                <a14:useLocalDpi xmlns:a14="http://schemas.microsoft.com/office/drawing/2010/main" val="0"/>
+              </a:ext>
+            </a:extLst>
+          </a:blip>
+          <a:srcRect/>
           <a:stretch/>
         </p:blipFill>
         <p:spPr>
           <a:xfrm>
-            <a:off x="2777337" y="1710585"/>
-            <a:ext cx="6637325" cy="3722600"/>
+            <a:off x="3214277" y="1290240"/>
+            <a:ext cx="5763445" cy="4686847"/>
           </a:xfrm>
           <a:prstGeom prst="rect">
             <a:avLst/>
           </a:prstGeom>
         </p:spPr>
       </p:pic>
-      <p:sp>
-        <p:nvSpPr>
-          <p:cNvPr id="8" name="TextBox 7">
-            <a:extLst>
-              <a:ext uri="{FF2B5EF4-FFF2-40B4-BE49-F238E27FC236}">
-                <a16:creationId xmlns:a16="http://schemas.microsoft.com/office/drawing/2014/main" id="{EA7BD16B-7203-483D-8665-334B149B3414}"/>
-              </a:ext>
-            </a:extLst>
-          </p:cNvPr>
-          <p:cNvSpPr txBox="1"/>
-          <p:nvPr/>
-        </p:nvSpPr>
-        <p:spPr>
-          <a:xfrm>
-            <a:off x="4131329" y="6010461"/>
-            <a:ext cx="3929342" cy="307777"/>
-          </a:xfrm>
-          <a:prstGeom prst="rect">
-            <a:avLst/>
-          </a:prstGeom>
-          <a:noFill/>
-        </p:spPr>
-        <p:txBody>
-          <a:bodyPr wrap="square" rtlCol="0">
-            <a:spAutoFit/>
-          </a:bodyPr>
-          <a:lstStyle/>
-          <a:p>
-            <a:pPr algn="ctr"/>
-            <a:r>
-              <a:rPr lang="ru-RU" sz="1400" dirty="0">
-                <a:latin typeface="Bicubik" panose="02000503020000020004" pitchFamily="50" charset="0"/>
-                <a:cs typeface="Times New Roman" panose="02020603050405020304" pitchFamily="18" charset="0"/>
-              </a:rPr>
-              <a:t>Рисунок 4 – Диаграмма классов(Ещё не готово)</a:t>
-            </a:r>
-          </a:p>
-        </p:txBody>
-      </p:sp>
     </p:spTree>
     <p:extLst>
       <p:ext uri="{BB962C8B-B14F-4D97-AF65-F5344CB8AC3E}">
@@ -6913,14 +7434,14 @@
           <p:nvPr/>
         </p:nvPicPr>
         <p:blipFill>
-          <a:blip r:embed="rId2">
+          <a:blip r:embed="rId3">
             <a:alphaModFix amt="50000"/>
             <a:extLst>
               <a:ext uri="{28A0092B-C50C-407E-A947-70E740481C1C}">
                 <a14:useLocalDpi xmlns:a14="http://schemas.microsoft.com/office/drawing/2010/main" val="0"/>
               </a:ext>
               <a:ext uri="{96DAC541-7B7A-43D3-8B79-37D633B846F1}">
-                <asvg:svgBlip xmlns:asvg="http://schemas.microsoft.com/office/drawing/2016/SVG/main" r:embed="rId3"/>
+                <asvg:svgBlip xmlns:asvg="http://schemas.microsoft.com/office/drawing/2016/SVG/main" r:embed="rId4"/>
               </a:ext>
             </a:extLst>
           </a:blip>
@@ -6953,13 +7474,13 @@
           <p:nvPr/>
         </p:nvPicPr>
         <p:blipFill>
-          <a:blip r:embed="rId4">
+          <a:blip r:embed="rId5">
             <a:extLst>
               <a:ext uri="{28A0092B-C50C-407E-A947-70E740481C1C}">
                 <a14:useLocalDpi xmlns:a14="http://schemas.microsoft.com/office/drawing/2010/main" val="0"/>
               </a:ext>
               <a:ext uri="{96DAC541-7B7A-43D3-8B79-37D633B846F1}">
-                <asvg:svgBlip xmlns:asvg="http://schemas.microsoft.com/office/drawing/2016/SVG/main" r:embed="rId5"/>
+                <asvg:svgBlip xmlns:asvg="http://schemas.microsoft.com/office/drawing/2016/SVG/main" r:embed="rId6"/>
               </a:ext>
             </a:extLst>
           </a:blip>
@@ -6983,43 +7504,6 @@
             <a:extLst>
               <a:ext uri="{FF2B5EF4-FFF2-40B4-BE49-F238E27FC236}">
                 <a16:creationId xmlns:a16="http://schemas.microsoft.com/office/drawing/2014/main" id="{6423F581-7307-4DF4-87D3-1667484E7A0E}"/>
-              </a:ext>
-            </a:extLst>
-          </p:cNvPr>
-          <p:cNvPicPr>
-            <a:picLocks noChangeAspect="1"/>
-          </p:cNvPicPr>
-          <p:nvPr/>
-        </p:nvPicPr>
-        <p:blipFill>
-          <a:blip r:embed="rId6">
-            <a:alphaModFix amt="34000"/>
-            <a:extLst>
-              <a:ext uri="{28A0092B-C50C-407E-A947-70E740481C1C}">
-                <a14:useLocalDpi xmlns:a14="http://schemas.microsoft.com/office/drawing/2010/main" val="0"/>
-              </a:ext>
-            </a:extLst>
-          </a:blip>
-          <a:stretch>
-            <a:fillRect/>
-          </a:stretch>
-        </p:blipFill>
-        <p:spPr>
-          <a:xfrm rot="20266875">
-            <a:off x="10289712" y="3637756"/>
-            <a:ext cx="2128176" cy="2128176"/>
-          </a:xfrm>
-          <a:prstGeom prst="rect">
-            <a:avLst/>
-          </a:prstGeom>
-        </p:spPr>
-      </p:pic>
-      <p:pic>
-        <p:nvPicPr>
-          <p:cNvPr id="17" name="Рисунок 16">
-            <a:extLst>
-              <a:ext uri="{FF2B5EF4-FFF2-40B4-BE49-F238E27FC236}">
-                <a16:creationId xmlns:a16="http://schemas.microsoft.com/office/drawing/2014/main" id="{8539FDB4-9E44-4A6E-9F89-4A0802D11709}"/>
               </a:ext>
             </a:extLst>
           </p:cNvPr>
@@ -7030,7 +7514,7 @@
         </p:nvPicPr>
         <p:blipFill>
           <a:blip r:embed="rId7">
-            <a:alphaModFix amt="56000"/>
+            <a:alphaModFix amt="34000"/>
             <a:extLst>
               <a:ext uri="{28A0092B-C50C-407E-A947-70E740481C1C}">
                 <a14:useLocalDpi xmlns:a14="http://schemas.microsoft.com/office/drawing/2010/main" val="0"/>
@@ -7042,119 +7526,21 @@
           </a:stretch>
         </p:blipFill>
         <p:spPr>
-          <a:xfrm rot="1401891">
-            <a:off x="-611342" y="5930793"/>
-            <a:ext cx="1854412" cy="1854412"/>
+          <a:xfrm rot="20266875">
+            <a:off x="10289712" y="3637756"/>
+            <a:ext cx="2128176" cy="2128176"/>
           </a:xfrm>
           <a:prstGeom prst="rect">
             <a:avLst/>
           </a:prstGeom>
         </p:spPr>
       </p:pic>
-      <p:sp>
-        <p:nvSpPr>
-          <p:cNvPr id="14" name="Заголовок 1">
-            <a:extLst>
-              <a:ext uri="{FF2B5EF4-FFF2-40B4-BE49-F238E27FC236}">
-                <a16:creationId xmlns:a16="http://schemas.microsoft.com/office/drawing/2014/main" id="{0E292885-0129-4E89-B556-5B99153EE148}"/>
-              </a:ext>
-            </a:extLst>
-          </p:cNvPr>
-          <p:cNvSpPr>
-            <a:spLocks noGrp="1"/>
-          </p:cNvSpPr>
-          <p:nvPr>
-            <p:ph type="title"/>
-          </p:nvPr>
-        </p:nvSpPr>
-        <p:spPr>
-          <a:xfrm>
-            <a:off x="312882" y="385022"/>
-            <a:ext cx="11566236" cy="1325563"/>
-          </a:xfrm>
-        </p:spPr>
-        <p:txBody>
-          <a:bodyPr>
-            <a:normAutofit/>
-          </a:bodyPr>
-          <a:lstStyle/>
-          <a:p>
-            <a:pPr algn="ctr"/>
-            <a:r>
-              <a:rPr lang="ru-RU" sz="3600" b="1" dirty="0">
-                <a:latin typeface="Bicubik" panose="02000503020000020004" pitchFamily="50" charset="0"/>
-              </a:rPr>
-              <a:t>Диаграмма классов</a:t>
-            </a:r>
-          </a:p>
-        </p:txBody>
-      </p:sp>
-      <p:sp>
-        <p:nvSpPr>
-          <p:cNvPr id="8" name="TextBox 7">
-            <a:extLst>
-              <a:ext uri="{FF2B5EF4-FFF2-40B4-BE49-F238E27FC236}">
-                <a16:creationId xmlns:a16="http://schemas.microsoft.com/office/drawing/2014/main" id="{EA7BD16B-7203-483D-8665-334B149B3414}"/>
-              </a:ext>
-            </a:extLst>
-          </p:cNvPr>
-          <p:cNvSpPr txBox="1"/>
-          <p:nvPr/>
-        </p:nvSpPr>
-        <p:spPr>
-          <a:xfrm>
-            <a:off x="4131329" y="6010461"/>
-            <a:ext cx="3929342" cy="523220"/>
-          </a:xfrm>
-          <a:prstGeom prst="rect">
-            <a:avLst/>
-          </a:prstGeom>
-          <a:noFill/>
-        </p:spPr>
-        <p:txBody>
-          <a:bodyPr wrap="square" rtlCol="0">
-            <a:spAutoFit/>
-          </a:bodyPr>
-          <a:lstStyle/>
-          <a:p>
-            <a:pPr algn="ctr"/>
-            <a:r>
-              <a:rPr lang="ru-RU" sz="1400" dirty="0">
-                <a:latin typeface="Bicubik" panose="02000503020000020004" pitchFamily="50" charset="0"/>
-                <a:cs typeface="Times New Roman" panose="02020603050405020304" pitchFamily="18" charset="0"/>
-              </a:rPr>
-              <a:t>Рисунок 5 – структура </a:t>
-            </a:r>
-            <a:r>
-              <a:rPr lang="ru-RU" sz="1400" dirty="0" err="1">
-                <a:latin typeface="Bicubik" panose="02000503020000020004" pitchFamily="50" charset="0"/>
-                <a:cs typeface="Times New Roman" panose="02020603050405020304" pitchFamily="18" charset="0"/>
-              </a:rPr>
-              <a:t>бд</a:t>
-            </a:r>
-            <a:r>
-              <a:rPr lang="en-US" sz="1400" dirty="0">
-                <a:latin typeface="Bicubik" panose="02000503020000020004" pitchFamily="50" charset="0"/>
-                <a:cs typeface="Times New Roman" panose="02020603050405020304" pitchFamily="18" charset="0"/>
-              </a:rPr>
-              <a:t>/er-</a:t>
-            </a:r>
-            <a:r>
-              <a:rPr lang="ru-RU" sz="1400" dirty="0">
-                <a:latin typeface="Bicubik" panose="02000503020000020004" pitchFamily="50" charset="0"/>
-                <a:cs typeface="Times New Roman" panose="02020603050405020304" pitchFamily="18" charset="0"/>
-              </a:rPr>
-              <a:t>диаграмма</a:t>
-            </a:r>
-          </a:p>
-        </p:txBody>
-      </p:sp>
       <p:pic>
         <p:nvPicPr>
-          <p:cNvPr id="10" name="Рисунок 9">
-            <a:extLst>
-              <a:ext uri="{FF2B5EF4-FFF2-40B4-BE49-F238E27FC236}">
-                <a16:creationId xmlns:a16="http://schemas.microsoft.com/office/drawing/2014/main" id="{2CBFDF70-95EE-4186-B08E-8852D95535E3}"/>
+          <p:cNvPr id="17" name="Рисунок 16">
+            <a:extLst>
+              <a:ext uri="{FF2B5EF4-FFF2-40B4-BE49-F238E27FC236}">
+                <a16:creationId xmlns:a16="http://schemas.microsoft.com/office/drawing/2014/main" id="{8539FDB4-9E44-4A6E-9F89-4A0802D11709}"/>
               </a:ext>
             </a:extLst>
           </p:cNvPr>
@@ -7165,19 +7551,149 @@
         </p:nvPicPr>
         <p:blipFill>
           <a:blip r:embed="rId8">
+            <a:alphaModFix amt="56000"/>
             <a:extLst>
               <a:ext uri="{28A0092B-C50C-407E-A947-70E740481C1C}">
                 <a14:useLocalDpi xmlns:a14="http://schemas.microsoft.com/office/drawing/2010/main" val="0"/>
               </a:ext>
             </a:extLst>
           </a:blip>
-          <a:srcRect/>
-          <a:stretch/>
+          <a:stretch>
+            <a:fillRect/>
+          </a:stretch>
         </p:blipFill>
         <p:spPr>
+          <a:xfrm rot="1401891">
+            <a:off x="-611342" y="5930793"/>
+            <a:ext cx="1854412" cy="1854412"/>
+          </a:xfrm>
+          <a:prstGeom prst="rect">
+            <a:avLst/>
+          </a:prstGeom>
+        </p:spPr>
+      </p:pic>
+      <p:sp>
+        <p:nvSpPr>
+          <p:cNvPr id="14" name="Заголовок 1">
+            <a:extLst>
+              <a:ext uri="{FF2B5EF4-FFF2-40B4-BE49-F238E27FC236}">
+                <a16:creationId xmlns:a16="http://schemas.microsoft.com/office/drawing/2014/main" id="{0E292885-0129-4E89-B556-5B99153EE148}"/>
+              </a:ext>
+            </a:extLst>
+          </p:cNvPr>
+          <p:cNvSpPr>
+            <a:spLocks noGrp="1"/>
+          </p:cNvSpPr>
+          <p:nvPr>
+            <p:ph type="title"/>
+          </p:nvPr>
+        </p:nvSpPr>
+        <p:spPr>
           <a:xfrm>
-            <a:off x="3214277" y="1290240"/>
-            <a:ext cx="5763445" cy="4686847"/>
+            <a:off x="312882" y="385022"/>
+            <a:ext cx="11566236" cy="1325563"/>
+          </a:xfrm>
+        </p:spPr>
+        <p:txBody>
+          <a:bodyPr>
+            <a:normAutofit/>
+          </a:bodyPr>
+          <a:lstStyle/>
+          <a:p>
+            <a:pPr algn="ctr"/>
+            <a:r>
+              <a:rPr lang="ru-RU" sz="3600" b="1" dirty="0">
+                <a:latin typeface="Bicubik" panose="02000503020000020004" pitchFamily="50" charset="0"/>
+              </a:rPr>
+              <a:t>Диаграмма классов</a:t>
+            </a:r>
+          </a:p>
+        </p:txBody>
+      </p:sp>
+      <p:sp>
+        <p:nvSpPr>
+          <p:cNvPr id="8" name="TextBox 7">
+            <a:extLst>
+              <a:ext uri="{FF2B5EF4-FFF2-40B4-BE49-F238E27FC236}">
+                <a16:creationId xmlns:a16="http://schemas.microsoft.com/office/drawing/2014/main" id="{EA7BD16B-7203-483D-8665-334B149B3414}"/>
+              </a:ext>
+            </a:extLst>
+          </p:cNvPr>
+          <p:cNvSpPr txBox="1"/>
+          <p:nvPr/>
+        </p:nvSpPr>
+        <p:spPr>
+          <a:xfrm>
+            <a:off x="4131329" y="6010461"/>
+            <a:ext cx="3929342" cy="523220"/>
+          </a:xfrm>
+          <a:prstGeom prst="rect">
+            <a:avLst/>
+          </a:prstGeom>
+          <a:noFill/>
+        </p:spPr>
+        <p:txBody>
+          <a:bodyPr wrap="square" rtlCol="0">
+            <a:spAutoFit/>
+          </a:bodyPr>
+          <a:lstStyle/>
+          <a:p>
+            <a:pPr algn="ctr"/>
+            <a:r>
+              <a:rPr lang="ru-RU" sz="1400" dirty="0">
+                <a:latin typeface="Bicubik" panose="02000503020000020004" pitchFamily="50" charset="0"/>
+                <a:cs typeface="Times New Roman" panose="02020603050405020304" pitchFamily="18" charset="0"/>
+              </a:rPr>
+              <a:t>Рисунок 5 – структура </a:t>
+            </a:r>
+            <a:r>
+              <a:rPr lang="ru-RU" sz="1400" dirty="0" err="1">
+                <a:latin typeface="Bicubik" panose="02000503020000020004" pitchFamily="50" charset="0"/>
+                <a:cs typeface="Times New Roman" panose="02020603050405020304" pitchFamily="18" charset="0"/>
+              </a:rPr>
+              <a:t>бд</a:t>
+            </a:r>
+            <a:r>
+              <a:rPr lang="en-US" sz="1400" dirty="0">
+                <a:latin typeface="Bicubik" panose="02000503020000020004" pitchFamily="50" charset="0"/>
+                <a:cs typeface="Times New Roman" panose="02020603050405020304" pitchFamily="18" charset="0"/>
+              </a:rPr>
+              <a:t>/er-</a:t>
+            </a:r>
+            <a:r>
+              <a:rPr lang="ru-RU" sz="1400" dirty="0">
+                <a:latin typeface="Bicubik" panose="02000503020000020004" pitchFamily="50" charset="0"/>
+                <a:cs typeface="Times New Roman" panose="02020603050405020304" pitchFamily="18" charset="0"/>
+              </a:rPr>
+              <a:t>диаграмма</a:t>
+            </a:r>
+          </a:p>
+        </p:txBody>
+      </p:sp>
+      <p:pic>
+        <p:nvPicPr>
+          <p:cNvPr id="3" name="Рисунок 2" descr="Изображение выглядит как текст, снимок экрана, Шрифт, Параллельный&#10;&#10;Содержимое, созданное искусственным интеллектом, может быть неверным.">
+            <a:extLst>
+              <a:ext uri="{FF2B5EF4-FFF2-40B4-BE49-F238E27FC236}">
+                <a16:creationId xmlns:a16="http://schemas.microsoft.com/office/drawing/2014/main" id="{DD339C21-5DF2-CF0E-92CF-68DA2ADEEC69}"/>
+              </a:ext>
+            </a:extLst>
+          </p:cNvPr>
+          <p:cNvPicPr>
+            <a:picLocks noChangeAspect="1"/>
+          </p:cNvPicPr>
+          <p:nvPr/>
+        </p:nvPicPr>
+        <p:blipFill>
+          <a:blip r:embed="rId9"/>
+          <a:stretch>
+            <a:fillRect/>
+          </a:stretch>
+        </p:blipFill>
+        <p:spPr>
+          <a:xfrm>
+            <a:off x="3234317" y="1410808"/>
+            <a:ext cx="5723366" cy="4599653"/>
           </a:xfrm>
           <a:prstGeom prst="rect">
             <a:avLst/>
@@ -7463,31 +7979,45 @@
             </a:r>
           </a:p>
           <a:p>
-            <a:r>
-              <a:rPr lang="en-US" dirty="0" err="1">
+            <a:pPr marL="0" indent="0">
+              <a:buNone/>
+            </a:pPr>
+            <a:r>
+              <a:rPr lang="en-US" dirty="0">
                 <a:latin typeface="Bicubik" panose="02000503020000020004"/>
               </a:rPr>
-              <a:t>SQLAlchemy</a:t>
+              <a:t>   SQLAlchemy</a:t>
             </a:r>
             <a:br>
               <a:rPr lang="ru-RU" dirty="0"/>
             </a:br>
             <a:r>
+              <a:rPr lang="en-US" dirty="0"/>
+              <a:t>   </a:t>
+            </a:r>
+            <a:r>
               <a:rPr lang="ru-RU" sz="2200" dirty="0"/>
               <a:t>Защита от SQL-инъекций, удобная работа с отношениями.</a:t>
             </a:r>
           </a:p>
           <a:p>
+            <a:pPr marL="0" indent="0">
+              <a:buNone/>
+            </a:pPr>
             <a:r>
               <a:rPr lang="en-US" dirty="0">
                 <a:latin typeface="Bicubik" panose="02000503020000020004"/>
               </a:rPr>
-              <a:t>MySQL</a:t>
+              <a:t>   MySQL</a:t>
             </a:r>
             <a:br>
               <a:rPr lang="ru-RU" dirty="0"/>
             </a:br>
             <a:r>
+              <a:rPr lang="en-US" dirty="0"/>
+              <a:t>   </a:t>
+            </a:r>
+            <a:r>
               <a:rPr lang="ru-RU" sz="2200" dirty="0"/>
               <a:t>Надёжность, высокая производительность, широкое распространение.</a:t>
             </a:r>
@@ -7497,17 +8027,7 @@
               <a:rPr lang="en-US" dirty="0">
                 <a:latin typeface="Bicubik" panose="02000503020000020004"/>
               </a:rPr>
-              <a:t>HTML5, CSS3, </a:t>
-            </a:r>
-            <a:r>
-              <a:rPr lang="ru-RU" dirty="0"/>
-              <a:t>ванильный </a:t>
-            </a:r>
-            <a:r>
-              <a:rPr lang="en-US" dirty="0">
-                <a:latin typeface="Bicubik" panose="02000503020000020004"/>
-              </a:rPr>
-              <a:t>JS</a:t>
+              <a:t>HTML5, CSS3</a:t>
             </a:r>
             <a:br>
               <a:rPr lang="ru-RU" dirty="0"/>
@@ -7525,6 +8045,186 @@
           </a:p>
         </p:txBody>
       </p:sp>
+      <p:pic>
+        <p:nvPicPr>
+          <p:cNvPr id="3" name="Рисунок 2" descr="Изображение выглядит как графическая вставка, символ, Графика, дизайн&#10;&#10;Содержимое, созданное искусственным интеллектом, может быть неверным.">
+            <a:extLst>
+              <a:ext uri="{FF2B5EF4-FFF2-40B4-BE49-F238E27FC236}">
+                <a16:creationId xmlns:a16="http://schemas.microsoft.com/office/drawing/2014/main" id="{5A577514-FEBE-0271-50D0-3014B3E01EA5}"/>
+              </a:ext>
+            </a:extLst>
+          </p:cNvPr>
+          <p:cNvPicPr>
+            <a:picLocks noChangeAspect="1"/>
+          </p:cNvPicPr>
+          <p:nvPr/>
+        </p:nvPicPr>
+        <p:blipFill>
+          <a:blip r:embed="rId8">
+            <a:extLst>
+              <a:ext uri="{28A0092B-C50C-407E-A947-70E740481C1C}">
+                <a14:useLocalDpi xmlns:a14="http://schemas.microsoft.com/office/drawing/2010/main" val="0"/>
+              </a:ext>
+            </a:extLst>
+          </a:blip>
+          <a:stretch>
+            <a:fillRect/>
+          </a:stretch>
+        </p:blipFill>
+        <p:spPr>
+          <a:xfrm>
+            <a:off x="347841" y="1742760"/>
+            <a:ext cx="709064" cy="679858"/>
+          </a:xfrm>
+          <a:prstGeom prst="rect">
+            <a:avLst/>
+          </a:prstGeom>
+        </p:spPr>
+      </p:pic>
+      <p:pic>
+        <p:nvPicPr>
+          <p:cNvPr id="5" name="Рисунок 4" descr="Изображение выглядит как рисунок, зарисовка, иллюстрация, черно-белый&#10;&#10;Содержимое, созданное искусственным интеллектом, может быть неверным.">
+            <a:extLst>
+              <a:ext uri="{FF2B5EF4-FFF2-40B4-BE49-F238E27FC236}">
+                <a16:creationId xmlns:a16="http://schemas.microsoft.com/office/drawing/2014/main" id="{B59B0692-F761-01C4-3235-E0FE84E63647}"/>
+              </a:ext>
+            </a:extLst>
+          </p:cNvPr>
+          <p:cNvPicPr>
+            <a:picLocks noChangeAspect="1"/>
+          </p:cNvPicPr>
+          <p:nvPr/>
+        </p:nvPicPr>
+        <p:blipFill>
+          <a:blip r:embed="rId9">
+            <a:extLst>
+              <a:ext uri="{28A0092B-C50C-407E-A947-70E740481C1C}">
+                <a14:useLocalDpi xmlns:a14="http://schemas.microsoft.com/office/drawing/2010/main" val="0"/>
+              </a:ext>
+            </a:extLst>
+          </a:blip>
+          <a:stretch>
+            <a:fillRect/>
+          </a:stretch>
+        </p:blipFill>
+        <p:spPr>
+          <a:xfrm>
+            <a:off x="353409" y="2553019"/>
+            <a:ext cx="679859" cy="679859"/>
+          </a:xfrm>
+          <a:prstGeom prst="rect">
+            <a:avLst/>
+          </a:prstGeom>
+        </p:spPr>
+      </p:pic>
+      <p:pic>
+        <p:nvPicPr>
+          <p:cNvPr id="7" name="Рисунок 6" descr="Изображение выглядит как Шрифт, Графика, логотип, графический дизайн&#10;&#10;Содержимое, созданное искусственным интеллектом, может быть неверным.">
+            <a:extLst>
+              <a:ext uri="{FF2B5EF4-FFF2-40B4-BE49-F238E27FC236}">
+                <a16:creationId xmlns:a16="http://schemas.microsoft.com/office/drawing/2014/main" id="{97F6A131-1542-5090-BD3E-F5C530E0BDAC}"/>
+              </a:ext>
+            </a:extLst>
+          </p:cNvPr>
+          <p:cNvPicPr>
+            <a:picLocks noChangeAspect="1"/>
+          </p:cNvPicPr>
+          <p:nvPr/>
+        </p:nvPicPr>
+        <p:blipFill>
+          <a:blip r:embed="rId10">
+            <a:extLst>
+              <a:ext uri="{28A0092B-C50C-407E-A947-70E740481C1C}">
+                <a14:useLocalDpi xmlns:a14="http://schemas.microsoft.com/office/drawing/2010/main" val="0"/>
+              </a:ext>
+            </a:extLst>
+          </a:blip>
+          <a:stretch>
+            <a:fillRect/>
+          </a:stretch>
+        </p:blipFill>
+        <p:spPr>
+          <a:xfrm>
+            <a:off x="329773" y="3330073"/>
+            <a:ext cx="727132" cy="727132"/>
+          </a:xfrm>
+          <a:prstGeom prst="rect">
+            <a:avLst/>
+          </a:prstGeom>
+        </p:spPr>
+      </p:pic>
+      <p:pic>
+        <p:nvPicPr>
+          <p:cNvPr id="9" name="Рисунок 8" descr="Изображение выглядит как Графика, дизайн, искусство&#10;&#10;Содержимое, созданное искусственным интеллектом, может быть неверным.">
+            <a:extLst>
+              <a:ext uri="{FF2B5EF4-FFF2-40B4-BE49-F238E27FC236}">
+                <a16:creationId xmlns:a16="http://schemas.microsoft.com/office/drawing/2014/main" id="{BA8CB86D-37A3-E283-2B83-A8285CA3BE88}"/>
+              </a:ext>
+            </a:extLst>
+          </p:cNvPr>
+          <p:cNvPicPr>
+            <a:picLocks noChangeAspect="1"/>
+          </p:cNvPicPr>
+          <p:nvPr/>
+        </p:nvPicPr>
+        <p:blipFill>
+          <a:blip r:embed="rId11">
+            <a:extLst>
+              <a:ext uri="{28A0092B-C50C-407E-A947-70E740481C1C}">
+                <a14:useLocalDpi xmlns:a14="http://schemas.microsoft.com/office/drawing/2010/main" val="0"/>
+              </a:ext>
+            </a:extLst>
+          </a:blip>
+          <a:stretch>
+            <a:fillRect/>
+          </a:stretch>
+        </p:blipFill>
+        <p:spPr>
+          <a:xfrm>
+            <a:off x="341591" y="4218839"/>
+            <a:ext cx="703496" cy="703496"/>
+          </a:xfrm>
+          <a:prstGeom prst="rect">
+            <a:avLst/>
+          </a:prstGeom>
+        </p:spPr>
+      </p:pic>
+      <p:pic>
+        <p:nvPicPr>
+          <p:cNvPr id="12" name="Рисунок 11" descr="Изображение выглядит как Графика, дизайн&#10;&#10;Содержимое, созданное искусственным интеллектом, может быть неверным.">
+            <a:extLst>
+              <a:ext uri="{FF2B5EF4-FFF2-40B4-BE49-F238E27FC236}">
+                <a16:creationId xmlns:a16="http://schemas.microsoft.com/office/drawing/2014/main" id="{F4EE1126-094E-9EC6-DB26-2EFD893C44E2}"/>
+              </a:ext>
+            </a:extLst>
+          </p:cNvPr>
+          <p:cNvPicPr>
+            <a:picLocks noChangeAspect="1"/>
+          </p:cNvPicPr>
+          <p:nvPr/>
+        </p:nvPicPr>
+        <p:blipFill>
+          <a:blip r:embed="rId12">
+            <a:extLst>
+              <a:ext uri="{28A0092B-C50C-407E-A947-70E740481C1C}">
+                <a14:useLocalDpi xmlns:a14="http://schemas.microsoft.com/office/drawing/2010/main" val="0"/>
+              </a:ext>
+            </a:extLst>
+          </a:blip>
+          <a:stretch>
+            <a:fillRect/>
+          </a:stretch>
+        </p:blipFill>
+        <p:spPr>
+          <a:xfrm>
+            <a:off x="270515" y="5154428"/>
+            <a:ext cx="845648" cy="547909"/>
+          </a:xfrm>
+          <a:prstGeom prst="rect">
+            <a:avLst/>
+          </a:prstGeom>
+        </p:spPr>
+      </p:pic>
     </p:spTree>
     <p:extLst>
       <p:ext uri="{BB962C8B-B14F-4D97-AF65-F5344CB8AC3E}">
@@ -7834,4 +8534,319 @@
     </a:ext>
   </a:extLst>
 </a:theme>
+</file>
+
+<file path=ppt/theme/theme2.xml><?xml version="1.0" encoding="utf-8"?>
+<a:theme xmlns:a="http://schemas.openxmlformats.org/drawingml/2006/main" name="Тема Office">
+  <a:themeElements>
+    <a:clrScheme name="Стандартная">
+      <a:dk1>
+        <a:sysClr val="windowText" lastClr="000000"/>
+      </a:dk1>
+      <a:lt1>
+        <a:sysClr val="window" lastClr="FFFFFF"/>
+      </a:lt1>
+      <a:dk2>
+        <a:srgbClr val="0E2841"/>
+      </a:dk2>
+      <a:lt2>
+        <a:srgbClr val="E8E8E8"/>
+      </a:lt2>
+      <a:accent1>
+        <a:srgbClr val="156082"/>
+      </a:accent1>
+      <a:accent2>
+        <a:srgbClr val="E97132"/>
+      </a:accent2>
+      <a:accent3>
+        <a:srgbClr val="196B24"/>
+      </a:accent3>
+      <a:accent4>
+        <a:srgbClr val="0F9ED5"/>
+      </a:accent4>
+      <a:accent5>
+        <a:srgbClr val="A02B93"/>
+      </a:accent5>
+      <a:accent6>
+        <a:srgbClr val="4EA72E"/>
+      </a:accent6>
+      <a:hlink>
+        <a:srgbClr val="467886"/>
+      </a:hlink>
+      <a:folHlink>
+        <a:srgbClr val="96607D"/>
+      </a:folHlink>
+    </a:clrScheme>
+    <a:fontScheme name="Стандартная">
+      <a:majorFont>
+        <a:latin typeface="Aptos Display" panose="02110004020202020204"/>
+        <a:ea typeface=""/>
+        <a:cs typeface=""/>
+        <a:font script="Jpan" typeface="游ゴシック Light"/>
+        <a:font script="Hang" typeface="맑은 고딕"/>
+        <a:font script="Hans" typeface="等线 Light"/>
+        <a:font script="Hant" typeface="新細明體"/>
+        <a:font script="Arab" typeface="Times New Roman"/>
+        <a:font script="Hebr" typeface="Times New Roman"/>
+        <a:font script="Thai" typeface="Angsana New"/>
+        <a:font script="Ethi" typeface="Nyala"/>
+        <a:font script="Beng" typeface="Vrinda"/>
+        <a:font script="Gujr" typeface="Shruti"/>
+        <a:font script="Khmr" typeface="MoolBoran"/>
+        <a:font script="Knda" typeface="Tunga"/>
+        <a:font script="Guru" typeface="Raavi"/>
+        <a:font script="Cans" typeface="Euphemia"/>
+        <a:font script="Cher" typeface="Plantagenet Cherokee"/>
+        <a:font script="Yiii" typeface="Microsoft Yi Baiti"/>
+        <a:font script="Tibt" typeface="Microsoft Himalaya"/>
+        <a:font script="Thaa" typeface="MV Boli"/>
+        <a:font script="Deva" typeface="Mangal"/>
+        <a:font script="Telu" typeface="Gautami"/>
+        <a:font script="Taml" typeface="Latha"/>
+        <a:font script="Syrc" typeface="Estrangelo Edessa"/>
+        <a:font script="Orya" typeface="Kalinga"/>
+        <a:font script="Mlym" typeface="Kartika"/>
+        <a:font script="Laoo" typeface="DokChampa"/>
+        <a:font script="Sinh" typeface="Iskoola Pota"/>
+        <a:font script="Mong" typeface="Mongolian Baiti"/>
+        <a:font script="Viet" typeface="Times New Roman"/>
+        <a:font script="Uigh" typeface="Microsoft Uighur"/>
+        <a:font script="Geor" typeface="Sylfaen"/>
+        <a:font script="Armn" typeface="Arial"/>
+        <a:font script="Bugi" typeface="Leelawadee UI"/>
+        <a:font script="Bopo" typeface="Microsoft JhengHei"/>
+        <a:font script="Java" typeface="Javanese Text"/>
+        <a:font script="Lisu" typeface="Segoe UI"/>
+        <a:font script="Mymr" typeface="Myanmar Text"/>
+        <a:font script="Nkoo" typeface="Ebrima"/>
+        <a:font script="Olck" typeface="Nirmala UI"/>
+        <a:font script="Osma" typeface="Ebrima"/>
+        <a:font script="Phag" typeface="Phagspa"/>
+        <a:font script="Syrn" typeface="Estrangelo Edessa"/>
+        <a:font script="Syrj" typeface="Estrangelo Edessa"/>
+        <a:font script="Syre" typeface="Estrangelo Edessa"/>
+        <a:font script="Sora" typeface="Nirmala UI"/>
+        <a:font script="Tale" typeface="Microsoft Tai Le"/>
+        <a:font script="Talu" typeface="Microsoft New Tai Lue"/>
+        <a:font script="Tfng" typeface="Ebrima"/>
+      </a:majorFont>
+      <a:minorFont>
+        <a:latin typeface="Aptos" panose="02110004020202020204"/>
+        <a:ea typeface=""/>
+        <a:cs typeface=""/>
+        <a:font script="Jpan" typeface="游ゴシック"/>
+        <a:font script="Hang" typeface="맑은 고딕"/>
+        <a:font script="Hans" typeface="等线"/>
+        <a:font script="Hant" typeface="新細明體"/>
+        <a:font script="Arab" typeface="Arial"/>
+        <a:font script="Hebr" typeface="Arial"/>
+        <a:font script="Thai" typeface="Cordia New"/>
+        <a:font script="Ethi" typeface="Nyala"/>
+        <a:font script="Beng" typeface="Vrinda"/>
+        <a:font script="Gujr" typeface="Shruti"/>
+        <a:font script="Khmr" typeface="DaunPenh"/>
+        <a:font script="Knda" typeface="Tunga"/>
+        <a:font script="Guru" typeface="Raavi"/>
+        <a:font script="Cans" typeface="Euphemia"/>
+        <a:font script="Cher" typeface="Plantagenet Cherokee"/>
+        <a:font script="Yiii" typeface="Microsoft Yi Baiti"/>
+        <a:font script="Tibt" typeface="Microsoft Himalaya"/>
+        <a:font script="Thaa" typeface="MV Boli"/>
+        <a:font script="Deva" typeface="Mangal"/>
+        <a:font script="Telu" typeface="Gautami"/>
+        <a:font script="Taml" typeface="Latha"/>
+        <a:font script="Syrc" typeface="Estrangelo Edessa"/>
+        <a:font script="Orya" typeface="Kalinga"/>
+        <a:font script="Mlym" typeface="Kartika"/>
+        <a:font script="Laoo" typeface="DokChampa"/>
+        <a:font script="Sinh" typeface="Iskoola Pota"/>
+        <a:font script="Mong" typeface="Mongolian Baiti"/>
+        <a:font script="Viet" typeface="Arial"/>
+        <a:font script="Uigh" typeface="Microsoft Uighur"/>
+        <a:font script="Geor" typeface="Sylfaen"/>
+        <a:font script="Armn" typeface="Arial"/>
+        <a:font script="Bugi" typeface="Leelawadee UI"/>
+        <a:font script="Bopo" typeface="Microsoft JhengHei"/>
+        <a:font script="Java" typeface="Javanese Text"/>
+        <a:font script="Lisu" typeface="Segoe UI"/>
+        <a:font script="Mymr" typeface="Myanmar Text"/>
+        <a:font script="Nkoo" typeface="Ebrima"/>
+        <a:font script="Olck" typeface="Nirmala UI"/>
+        <a:font script="Osma" typeface="Ebrima"/>
+        <a:font script="Phag" typeface="Phagspa"/>
+        <a:font script="Syrn" typeface="Estrangelo Edessa"/>
+        <a:font script="Syrj" typeface="Estrangelo Edessa"/>
+        <a:font script="Syre" typeface="Estrangelo Edessa"/>
+        <a:font script="Sora" typeface="Nirmala UI"/>
+        <a:font script="Tale" typeface="Microsoft Tai Le"/>
+        <a:font script="Talu" typeface="Microsoft New Tai Lue"/>
+        <a:font script="Tfng" typeface="Ebrima"/>
+      </a:minorFont>
+    </a:fontScheme>
+    <a:fmtScheme name="Стандартная">
+      <a:fillStyleLst>
+        <a:solidFill>
+          <a:schemeClr val="phClr"/>
+        </a:solidFill>
+        <a:gradFill rotWithShape="1">
+          <a:gsLst>
+            <a:gs pos="0">
+              <a:schemeClr val="phClr">
+                <a:lumMod val="110000"/>
+                <a:satMod val="105000"/>
+                <a:tint val="67000"/>
+              </a:schemeClr>
+            </a:gs>
+            <a:gs pos="50000">
+              <a:schemeClr val="phClr">
+                <a:lumMod val="105000"/>
+                <a:satMod val="103000"/>
+                <a:tint val="73000"/>
+              </a:schemeClr>
+            </a:gs>
+            <a:gs pos="100000">
+              <a:schemeClr val="phClr">
+                <a:lumMod val="105000"/>
+                <a:satMod val="109000"/>
+                <a:tint val="81000"/>
+              </a:schemeClr>
+            </a:gs>
+          </a:gsLst>
+          <a:lin ang="5400000" scaled="0"/>
+        </a:gradFill>
+        <a:gradFill rotWithShape="1">
+          <a:gsLst>
+            <a:gs pos="0">
+              <a:schemeClr val="phClr">
+                <a:satMod val="103000"/>
+                <a:lumMod val="102000"/>
+                <a:tint val="94000"/>
+              </a:schemeClr>
+            </a:gs>
+            <a:gs pos="50000">
+              <a:schemeClr val="phClr">
+                <a:satMod val="110000"/>
+                <a:lumMod val="100000"/>
+                <a:shade val="100000"/>
+              </a:schemeClr>
+            </a:gs>
+            <a:gs pos="100000">
+              <a:schemeClr val="phClr">
+                <a:lumMod val="99000"/>
+                <a:satMod val="120000"/>
+                <a:shade val="78000"/>
+              </a:schemeClr>
+            </a:gs>
+          </a:gsLst>
+          <a:lin ang="5400000" scaled="0"/>
+        </a:gradFill>
+      </a:fillStyleLst>
+      <a:lnStyleLst>
+        <a:ln w="12700" cap="flat" cmpd="sng" algn="ctr">
+          <a:solidFill>
+            <a:schemeClr val="phClr"/>
+          </a:solidFill>
+          <a:prstDash val="solid"/>
+          <a:miter lim="800000"/>
+        </a:ln>
+        <a:ln w="19050" cap="flat" cmpd="sng" algn="ctr">
+          <a:solidFill>
+            <a:schemeClr val="phClr"/>
+          </a:solidFill>
+          <a:prstDash val="solid"/>
+          <a:miter lim="800000"/>
+        </a:ln>
+        <a:ln w="25400" cap="flat" cmpd="sng" algn="ctr">
+          <a:solidFill>
+            <a:schemeClr val="phClr"/>
+          </a:solidFill>
+          <a:prstDash val="solid"/>
+          <a:miter lim="800000"/>
+        </a:ln>
+      </a:lnStyleLst>
+      <a:effectStyleLst>
+        <a:effectStyle>
+          <a:effectLst/>
+        </a:effectStyle>
+        <a:effectStyle>
+          <a:effectLst/>
+        </a:effectStyle>
+        <a:effectStyle>
+          <a:effectLst>
+            <a:outerShdw blurRad="57150" dist="19050" dir="5400000" algn="ctr" rotWithShape="0">
+              <a:srgbClr val="000000">
+                <a:alpha val="63000"/>
+              </a:srgbClr>
+            </a:outerShdw>
+          </a:effectLst>
+        </a:effectStyle>
+      </a:effectStyleLst>
+      <a:bgFillStyleLst>
+        <a:solidFill>
+          <a:schemeClr val="phClr"/>
+        </a:solidFill>
+        <a:solidFill>
+          <a:schemeClr val="phClr">
+            <a:tint val="95000"/>
+            <a:satMod val="170000"/>
+          </a:schemeClr>
+        </a:solidFill>
+        <a:gradFill rotWithShape="1">
+          <a:gsLst>
+            <a:gs pos="0">
+              <a:schemeClr val="phClr">
+                <a:tint val="93000"/>
+                <a:satMod val="150000"/>
+                <a:shade val="98000"/>
+                <a:lumMod val="102000"/>
+              </a:schemeClr>
+            </a:gs>
+            <a:gs pos="50000">
+              <a:schemeClr val="phClr">
+                <a:tint val="98000"/>
+                <a:satMod val="130000"/>
+                <a:shade val="90000"/>
+                <a:lumMod val="103000"/>
+              </a:schemeClr>
+            </a:gs>
+            <a:gs pos="100000">
+              <a:schemeClr val="phClr">
+                <a:shade val="63000"/>
+                <a:satMod val="120000"/>
+              </a:schemeClr>
+            </a:gs>
+          </a:gsLst>
+          <a:lin ang="5400000" scaled="0"/>
+        </a:gradFill>
+      </a:bgFillStyleLst>
+    </a:fmtScheme>
+  </a:themeElements>
+  <a:objectDefaults>
+    <a:lnDef>
+      <a:spPr/>
+      <a:bodyPr/>
+      <a:lstStyle/>
+      <a:style>
+        <a:lnRef idx="2">
+          <a:schemeClr val="accent1"/>
+        </a:lnRef>
+        <a:fillRef idx="0">
+          <a:schemeClr val="accent1"/>
+        </a:fillRef>
+        <a:effectRef idx="1">
+          <a:schemeClr val="accent1"/>
+        </a:effectRef>
+        <a:fontRef idx="minor">
+          <a:schemeClr val="tx1"/>
+        </a:fontRef>
+      </a:style>
+    </a:lnDef>
+  </a:objectDefaults>
+  <a:extraClrSchemeLst/>
+  <a:extLst>
+    <a:ext uri="{05A4C25C-085E-4340-85A3-A5531E510DB2}">
+      <thm15:themeFamily xmlns:thm15="http://schemas.microsoft.com/office/thememl/2012/main" name="Office Theme" id="{2E142A2C-CD16-42D6-873A-C26D2A0506FA}" vid="{1BDDFF52-6CD6-40A5-AB3C-68EB2F1E4D0A}"/>
+    </a:ext>
+  </a:extLst>
+</a:theme>
 </file>